--- a/folletos/2026-04/pptx/FIP_VANTRUST_LIQUIDEZ_SENCILLO.pptx
+++ b/folletos/2026-04/pptx/FIP_VANTRUST_LIQUIDEZ_SENCILLO.pptx
@@ -2927,7 +2927,7 @@
                 <a:ea typeface="Calibri" pitchFamily="34" charset="-122"/>
                 <a:cs typeface="Calibri" pitchFamily="34" charset="-120"/>
               </a:rPr>
-              <a:t>prueba CLP</a:t>
+              <a:t>prueba 2 CLP</a:t>
             </a:r>
             <a:endParaRPr lang="en-US" sz="800" dirty="0"/>
           </a:p>

--- a/folletos/2026-04/pptx/FIP_VANTRUST_LIQUIDEZ_SENCILLO.pptx
+++ b/folletos/2026-04/pptx/FIP_VANTRUST_LIQUIDEZ_SENCILLO.pptx
@@ -5363,7 +5363,7 @@
                 <a:ea typeface="Calibri" pitchFamily="34" charset="-122"/>
                 <a:cs typeface="Calibri" pitchFamily="34" charset="-120"/>
               </a:rPr>
-              <a:t>prueba CLP</a:t>
+              <a:t>prueba 3 CLP</a:t>
             </a:r>
             <a:endParaRPr lang="en-US" sz="800" dirty="0"/>
           </a:p>

--- a/folletos/2026-04/pptx/FIP_VANTRUST_LIQUIDEZ_SENCILLO.pptx
+++ b/folletos/2026-04/pptx/FIP_VANTRUST_LIQUIDEZ_SENCILLO.pptx
@@ -6323,7 +6323,7 @@
                 <a:ea typeface="Calibri" pitchFamily="34" charset="-122"/>
                 <a:cs typeface="Calibri" pitchFamily="34" charset="-120"/>
               </a:rPr>
-              <a:t>prueba CLP</a:t>
+              <a:t>prueba 4 CLP</a:t>
             </a:r>
             <a:endParaRPr lang="en-US" sz="800" dirty="0"/>
           </a:p>

--- a/folletos/2026-04/pptx/FIP_VANTRUST_LIQUIDEZ_SENCILLO.pptx
+++ b/folletos/2026-04/pptx/FIP_VANTRUST_LIQUIDEZ_SENCILLO.pptx
@@ -6373,7 +6373,7 @@
                 <a:ea typeface="Calibri" pitchFamily="34" charset="-122"/>
                 <a:cs typeface="Calibri" pitchFamily="34" charset="-120"/>
               </a:rPr>
-              <a:t>prueba CLP</a:t>
+              <a:t>prueba 6 CLP</a:t>
             </a:r>
             <a:endParaRPr lang="en-US" sz="800" dirty="0"/>
           </a:p>

--- a/folletos/2026-04/pptx/FIP_VANTRUST_LIQUIDEZ_SENCILLO.pptx
+++ b/folletos/2026-04/pptx/FIP_VANTRUST_LIQUIDEZ_SENCILLO.pptx
@@ -6373,7 +6373,7 @@
                 <a:ea typeface="Calibri" pitchFamily="34" charset="-122"/>
                 <a:cs typeface="Calibri" pitchFamily="34" charset="-120"/>
               </a:rPr>
-              <a:t>prueba 6 CLP</a:t>
+              <a:t>prueba CLP</a:t>
             </a:r>
             <a:endParaRPr lang="en-US" sz="800" dirty="0"/>
           </a:p>
@@ -33352,13 +33352,91 @@
       </p:sp>
       <p:sp>
         <p:nvSpPr>
-          <p:cNvPr id="8" name="Shape 6"/>
+          <p:cNvPr id="8" name="Text 6"/>
           <p:cNvSpPr/>
           <p:nvPr/>
         </p:nvSpPr>
         <p:spPr>
           <a:xfrm>
-            <a:off x="118872" y="1810512"/>
+            <a:off x="118872" y="1719072"/>
+            <a:ext cx="1188720" cy="173736"/>
+          </a:xfrm>
+          <a:prstGeom prst="rect">
+            <a:avLst/>
+          </a:prstGeom>
+          <a:noFill/>
+          <a:ln/>
+        </p:spPr>
+        <p:txBody>
+          <a:bodyPr wrap="square" lIns="0" tIns="0" rIns="0" bIns="0" rtlCol="0" anchor="ctr"/>
+          <a:lstStyle/>
+          <a:p>
+            <a:pPr indent="0" marL="0">
+              <a:buNone/>
+            </a:pPr>
+            <a:r>
+              <a:rPr lang="en-US" sz="750" dirty="0">
+                <a:solidFill>
+                  <a:srgbClr val="000000"/>
+                </a:solidFill>
+                <a:latin typeface="Calibri" pitchFamily="34" charset="0"/>
+                <a:ea typeface="Calibri" pitchFamily="34" charset="-122"/>
+                <a:cs typeface="Calibri" pitchFamily="34" charset="-120"/>
+              </a:rPr>
+              <a:t>CLP</a:t>
+            </a:r>
+            <a:endParaRPr lang="en-US" sz="750" dirty="0"/>
+          </a:p>
+        </p:txBody>
+      </p:sp>
+      <p:sp>
+        <p:nvSpPr>
+          <p:cNvPr id="9" name="Text 7"/>
+          <p:cNvSpPr/>
+          <p:nvPr/>
+        </p:nvSpPr>
+        <p:spPr>
+          <a:xfrm>
+            <a:off x="1307592" y="1719072"/>
+            <a:ext cx="1024128" cy="173736"/>
+          </a:xfrm>
+          <a:prstGeom prst="rect">
+            <a:avLst/>
+          </a:prstGeom>
+          <a:noFill/>
+          <a:ln/>
+        </p:spPr>
+        <p:txBody>
+          <a:bodyPr wrap="square" lIns="0" tIns="0" rIns="0" bIns="0" rtlCol="0" anchor="ctr"/>
+          <a:lstStyle/>
+          <a:p>
+            <a:pPr algn="r" indent="0" marL="0">
+              <a:buNone/>
+            </a:pPr>
+            <a:r>
+              <a:rPr lang="en-US" sz="750" b="1" dirty="0">
+                <a:solidFill>
+                  <a:srgbClr val="000000"/>
+                </a:solidFill>
+                <a:latin typeface="Calibri" pitchFamily="34" charset="0"/>
+                <a:ea typeface="Calibri" pitchFamily="34" charset="-122"/>
+                <a:cs typeface="Calibri" pitchFamily="34" charset="-120"/>
+              </a:rPr>
+              <a:t>100,00%</a:t>
+            </a:r>
+            <a:endParaRPr lang="en-US" sz="750" dirty="0"/>
+          </a:p>
+        </p:txBody>
+      </p:sp>
+      <p:sp>
+        <p:nvSpPr>
+          <p:cNvPr id="10" name="Shape 8"/>
+          <p:cNvSpPr/>
+          <p:nvPr/>
+        </p:nvSpPr>
+        <p:spPr>
+          <a:xfrm>
+            <a:off x="118872" y="2002536"/>
             <a:ext cx="2212848" cy="0"/>
           </a:xfrm>
           <a:prstGeom prst="line">
@@ -33375,13 +33453,13 @@
       </p:sp>
       <p:sp>
         <p:nvSpPr>
-          <p:cNvPr id="9" name="Text 7"/>
+          <p:cNvPr id="11" name="Text 9"/>
           <p:cNvSpPr/>
           <p:nvPr/>
         </p:nvSpPr>
         <p:spPr>
           <a:xfrm>
-            <a:off x="118872" y="1901952"/>
+            <a:off x="118872" y="2093976"/>
             <a:ext cx="2212848" cy="164592"/>
           </a:xfrm>
           <a:prstGeom prst="rect">
@@ -33414,13 +33492,13 @@
       </p:sp>
       <p:sp>
         <p:nvSpPr>
-          <p:cNvPr id="10" name="Shape 8"/>
+          <p:cNvPr id="12" name="Shape 10"/>
           <p:cNvSpPr/>
           <p:nvPr/>
         </p:nvSpPr>
         <p:spPr>
           <a:xfrm>
-            <a:off x="118872" y="2084832"/>
+            <a:off x="118872" y="2276856"/>
             <a:ext cx="2212848" cy="0"/>
           </a:xfrm>
           <a:prstGeom prst="line">
@@ -33437,13 +33515,13 @@
       </p:sp>
       <p:sp>
         <p:nvSpPr>
-          <p:cNvPr id="11" name="Text 9"/>
+          <p:cNvPr id="13" name="Text 11"/>
           <p:cNvSpPr/>
           <p:nvPr/>
         </p:nvSpPr>
         <p:spPr>
           <a:xfrm>
-            <a:off x="118872" y="2157984"/>
+            <a:off x="118872" y="2350008"/>
             <a:ext cx="1371600" cy="164592"/>
           </a:xfrm>
           <a:prstGeom prst="rect">
@@ -33476,13 +33554,13 @@
       </p:sp>
       <p:sp>
         <p:nvSpPr>
-          <p:cNvPr id="12" name="Text 10"/>
+          <p:cNvPr id="14" name="Text 12"/>
           <p:cNvSpPr/>
           <p:nvPr/>
         </p:nvSpPr>
         <p:spPr>
           <a:xfrm>
-            <a:off x="1490472" y="2157984"/>
+            <a:off x="1490472" y="2350008"/>
             <a:ext cx="841248" cy="164592"/>
           </a:xfrm>
           <a:prstGeom prst="rect">
@@ -33507,7 +33585,7 @@
                 <a:ea typeface="Calibri" pitchFamily="34" charset="-122"/>
                 <a:cs typeface="Calibri" pitchFamily="34" charset="-120"/>
               </a:rPr>
-              <a:t>100,00%</a:t>
+              <a:t>99,55%</a:t>
             </a:r>
             <a:endParaRPr lang="en-US" sz="700" dirty="0"/>
           </a:p>
@@ -33515,13 +33593,91 @@
       </p:sp>
       <p:sp>
         <p:nvSpPr>
-          <p:cNvPr id="13" name="Shape 11"/>
+          <p:cNvPr id="15" name="Text 13"/>
           <p:cNvSpPr/>
           <p:nvPr/>
         </p:nvSpPr>
         <p:spPr>
           <a:xfrm>
-            <a:off x="118872" y="2423160"/>
+            <a:off x="118872" y="2523744"/>
+            <a:ext cx="1371600" cy="164592"/>
+          </a:xfrm>
+          <a:prstGeom prst="rect">
+            <a:avLst/>
+          </a:prstGeom>
+          <a:noFill/>
+          <a:ln/>
+        </p:spPr>
+        <p:txBody>
+          <a:bodyPr wrap="square" lIns="0" tIns="0" rIns="0" bIns="0" rtlCol="0" anchor="ctr"/>
+          <a:lstStyle/>
+          <a:p>
+            <a:pPr indent="0" marL="0">
+              <a:buNone/>
+            </a:pPr>
+            <a:r>
+              <a:rPr lang="en-US" sz="700" dirty="0">
+                <a:solidFill>
+                  <a:srgbClr val="000000"/>
+                </a:solidFill>
+                <a:latin typeface="Calibri" pitchFamily="34" charset="0"/>
+                <a:ea typeface="Calibri" pitchFamily="34" charset="-122"/>
+                <a:cs typeface="Calibri" pitchFamily="34" charset="-120"/>
+              </a:rPr>
+              <a:t>Inmob</a:t>
+            </a:r>
+            <a:endParaRPr lang="en-US" sz="700" dirty="0"/>
+          </a:p>
+        </p:txBody>
+      </p:sp>
+      <p:sp>
+        <p:nvSpPr>
+          <p:cNvPr id="16" name="Text 14"/>
+          <p:cNvSpPr/>
+          <p:nvPr/>
+        </p:nvSpPr>
+        <p:spPr>
+          <a:xfrm>
+            <a:off x="1490472" y="2523744"/>
+            <a:ext cx="841248" cy="164592"/>
+          </a:xfrm>
+          <a:prstGeom prst="rect">
+            <a:avLst/>
+          </a:prstGeom>
+          <a:noFill/>
+          <a:ln/>
+        </p:spPr>
+        <p:txBody>
+          <a:bodyPr wrap="square" lIns="0" tIns="0" rIns="0" bIns="0" rtlCol="0" anchor="ctr"/>
+          <a:lstStyle/>
+          <a:p>
+            <a:pPr algn="r" indent="0" marL="0">
+              <a:buNone/>
+            </a:pPr>
+            <a:r>
+              <a:rPr lang="en-US" sz="700" b="1" dirty="0">
+                <a:solidFill>
+                  <a:srgbClr val="000000"/>
+                </a:solidFill>
+                <a:latin typeface="Calibri" pitchFamily="34" charset="0"/>
+                <a:ea typeface="Calibri" pitchFamily="34" charset="-122"/>
+                <a:cs typeface="Calibri" pitchFamily="34" charset="-120"/>
+              </a:rPr>
+              <a:t>0,45%</a:t>
+            </a:r>
+            <a:endParaRPr lang="en-US" sz="700" dirty="0"/>
+          </a:p>
+        </p:txBody>
+      </p:sp>
+      <p:sp>
+        <p:nvSpPr>
+          <p:cNvPr id="17" name="Shape 15"/>
+          <p:cNvSpPr/>
+          <p:nvPr/>
+        </p:nvSpPr>
+        <p:spPr>
+          <a:xfrm>
+            <a:off x="118872" y="2788920"/>
             <a:ext cx="2212848" cy="0"/>
           </a:xfrm>
           <a:prstGeom prst="line">
@@ -33538,13 +33694,13 @@
       </p:sp>
       <p:sp>
         <p:nvSpPr>
-          <p:cNvPr id="14" name="Text 12"/>
+          <p:cNvPr id="18" name="Text 16"/>
           <p:cNvSpPr/>
           <p:nvPr/>
         </p:nvSpPr>
         <p:spPr>
           <a:xfrm>
-            <a:off x="118872" y="2514600"/>
+            <a:off x="118872" y="2880360"/>
             <a:ext cx="2212848" cy="164592"/>
           </a:xfrm>
           <a:prstGeom prst="rect">
@@ -33577,13 +33733,13 @@
       </p:sp>
       <p:sp>
         <p:nvSpPr>
-          <p:cNvPr id="15" name="Shape 13"/>
+          <p:cNvPr id="19" name="Shape 17"/>
           <p:cNvSpPr/>
           <p:nvPr/>
         </p:nvSpPr>
         <p:spPr>
           <a:xfrm>
-            <a:off x="118872" y="2697480"/>
+            <a:off x="118872" y="3063240"/>
             <a:ext cx="2212848" cy="0"/>
           </a:xfrm>
           <a:prstGeom prst="line">
@@ -33600,13 +33756,13 @@
       </p:sp>
       <p:sp>
         <p:nvSpPr>
-          <p:cNvPr id="16" name="Text 14"/>
+          <p:cNvPr id="20" name="Text 18"/>
           <p:cNvSpPr/>
           <p:nvPr/>
         </p:nvSpPr>
         <p:spPr>
           <a:xfrm>
-            <a:off x="118872" y="2770632"/>
+            <a:off x="118872" y="3136392"/>
             <a:ext cx="1371600" cy="182880"/>
           </a:xfrm>
           <a:prstGeom prst="rect">
@@ -33639,13 +33795,13 @@
       </p:sp>
       <p:sp>
         <p:nvSpPr>
-          <p:cNvPr id="17" name="Text 15"/>
+          <p:cNvPr id="21" name="Text 19"/>
           <p:cNvSpPr/>
           <p:nvPr/>
         </p:nvSpPr>
         <p:spPr>
           <a:xfrm>
-            <a:off x="1490472" y="2770632"/>
+            <a:off x="1490472" y="3136392"/>
             <a:ext cx="841248" cy="182880"/>
           </a:xfrm>
           <a:prstGeom prst="rect">
@@ -33670,7 +33826,7 @@
                 <a:ea typeface="Calibri" pitchFamily="34" charset="-122"/>
                 <a:cs typeface="Calibri" pitchFamily="34" charset="-120"/>
               </a:rPr>
-              <a:t>63,16%</a:t>
+              <a:t>59,50%</a:t>
             </a:r>
             <a:endParaRPr lang="en-US" sz="750" dirty="0"/>
           </a:p>
@@ -33678,13 +33834,13 @@
       </p:sp>
       <p:sp>
         <p:nvSpPr>
-          <p:cNvPr id="18" name="Text 16"/>
+          <p:cNvPr id="22" name="Text 20"/>
           <p:cNvSpPr/>
           <p:nvPr/>
         </p:nvSpPr>
         <p:spPr>
           <a:xfrm>
-            <a:off x="118872" y="2971800"/>
+            <a:off x="118872" y="3337560"/>
             <a:ext cx="1371600" cy="182880"/>
           </a:xfrm>
           <a:prstGeom prst="rect">
@@ -33717,13 +33873,13 @@
       </p:sp>
       <p:sp>
         <p:nvSpPr>
-          <p:cNvPr id="19" name="Text 17"/>
+          <p:cNvPr id="23" name="Text 21"/>
           <p:cNvSpPr/>
           <p:nvPr/>
         </p:nvSpPr>
         <p:spPr>
           <a:xfrm>
-            <a:off x="1490472" y="2971800"/>
+            <a:off x="1490472" y="3337560"/>
             <a:ext cx="841248" cy="182880"/>
           </a:xfrm>
           <a:prstGeom prst="rect">
@@ -33748,7 +33904,7 @@
                 <a:ea typeface="Calibri" pitchFamily="34" charset="-122"/>
                 <a:cs typeface="Calibri" pitchFamily="34" charset="-120"/>
               </a:rPr>
-              <a:t>28,00%</a:t>
+              <a:t>38,91%</a:t>
             </a:r>
             <a:endParaRPr lang="en-US" sz="750" dirty="0"/>
           </a:p>
@@ -33756,13 +33912,13 @@
       </p:sp>
       <p:sp>
         <p:nvSpPr>
-          <p:cNvPr id="20" name="Text 18"/>
+          <p:cNvPr id="24" name="Text 22"/>
           <p:cNvSpPr/>
           <p:nvPr/>
         </p:nvSpPr>
         <p:spPr>
           <a:xfrm>
-            <a:off x="118872" y="3172968"/>
+            <a:off x="118872" y="3538728"/>
             <a:ext cx="1371600" cy="182880"/>
           </a:xfrm>
           <a:prstGeom prst="rect">
@@ -33795,13 +33951,13 @@
       </p:sp>
       <p:sp>
         <p:nvSpPr>
-          <p:cNvPr id="21" name="Text 19"/>
+          <p:cNvPr id="25" name="Text 23"/>
           <p:cNvSpPr/>
           <p:nvPr/>
         </p:nvSpPr>
         <p:spPr>
           <a:xfrm>
-            <a:off x="1490472" y="3172968"/>
+            <a:off x="1490472" y="3538728"/>
             <a:ext cx="841248" cy="182880"/>
           </a:xfrm>
           <a:prstGeom prst="rect">
@@ -33826,7 +33982,7 @@
                 <a:ea typeface="Calibri" pitchFamily="34" charset="-122"/>
                 <a:cs typeface="Calibri" pitchFamily="34" charset="-120"/>
               </a:rPr>
-              <a:t>8,84%</a:t>
+              <a:t>1,59%</a:t>
             </a:r>
             <a:endParaRPr lang="en-US" sz="750" dirty="0"/>
           </a:p>
@@ -33834,13 +33990,13 @@
       </p:sp>
       <p:sp>
         <p:nvSpPr>
-          <p:cNvPr id="22" name="Text 20"/>
+          <p:cNvPr id="26" name="Text 24"/>
           <p:cNvSpPr/>
           <p:nvPr/>
         </p:nvSpPr>
         <p:spPr>
           <a:xfrm>
-            <a:off x="118872" y="3374136"/>
+            <a:off x="118872" y="3739896"/>
             <a:ext cx="1371600" cy="182880"/>
           </a:xfrm>
           <a:prstGeom prst="rect">
@@ -33873,13 +34029,13 @@
       </p:sp>
       <p:sp>
         <p:nvSpPr>
-          <p:cNvPr id="23" name="Text 21"/>
+          <p:cNvPr id="27" name="Text 25"/>
           <p:cNvSpPr/>
           <p:nvPr/>
         </p:nvSpPr>
         <p:spPr>
           <a:xfrm>
-            <a:off x="1490472" y="3374136"/>
+            <a:off x="1490472" y="3739896"/>
             <a:ext cx="841248" cy="182880"/>
           </a:xfrm>
           <a:prstGeom prst="rect">
@@ -33912,7 +34068,7 @@
       </p:sp>
       <p:sp>
         <p:nvSpPr>
-          <p:cNvPr id="24" name="Text 22"/>
+          <p:cNvPr id="28" name="Text 26"/>
           <p:cNvSpPr/>
           <p:nvPr/>
         </p:nvSpPr>
@@ -33951,7 +34107,7 @@
       </p:sp>
       <p:sp>
         <p:nvSpPr>
-          <p:cNvPr id="25" name="Shape 23"/>
+          <p:cNvPr id="29" name="Shape 27"/>
           <p:cNvSpPr/>
           <p:nvPr/>
         </p:nvSpPr>
@@ -33974,7 +34130,7 @@
       </p:sp>
       <p:sp>
         <p:nvSpPr>
-          <p:cNvPr id="26" name="Text 24"/>
+          <p:cNvPr id="30" name="Text 28"/>
           <p:cNvSpPr/>
           <p:nvPr/>
         </p:nvSpPr>
@@ -34030,7 +34186,7 @@
       </p:sp>
       <p:sp>
         <p:nvSpPr>
-          <p:cNvPr id="27" name="Text 25"/>
+          <p:cNvPr id="31" name="Text 29"/>
           <p:cNvSpPr/>
           <p:nvPr/>
         </p:nvSpPr>
@@ -34086,7 +34242,7 @@
       </p:sp>
       <p:sp>
         <p:nvSpPr>
-          <p:cNvPr id="28" name="Text 26"/>
+          <p:cNvPr id="32" name="Text 30"/>
           <p:cNvSpPr/>
           <p:nvPr/>
         </p:nvSpPr>
@@ -34142,7 +34298,7 @@
       </p:sp>
       <p:sp>
         <p:nvSpPr>
-          <p:cNvPr id="29" name="Text 27"/>
+          <p:cNvPr id="33" name="Text 31"/>
           <p:cNvSpPr/>
           <p:nvPr/>
         </p:nvSpPr>
@@ -34198,7 +34354,7 @@
       </p:sp>
       <p:sp>
         <p:nvSpPr>
-          <p:cNvPr id="30" name="Text 28"/>
+          <p:cNvPr id="34" name="Text 32"/>
           <p:cNvSpPr/>
           <p:nvPr/>
         </p:nvSpPr>
@@ -34254,7 +34410,7 @@
       </p:sp>
       <p:sp>
         <p:nvSpPr>
-          <p:cNvPr id="31" name="Text 29"/>
+          <p:cNvPr id="35" name="Text 33"/>
           <p:cNvSpPr/>
           <p:nvPr/>
         </p:nvSpPr>
@@ -34310,7 +34466,7 @@
       </p:sp>
       <p:sp>
         <p:nvSpPr>
-          <p:cNvPr id="32" name="Text 30"/>
+          <p:cNvPr id="36" name="Text 34"/>
           <p:cNvSpPr/>
           <p:nvPr/>
         </p:nvSpPr>
@@ -34366,7 +34522,7 @@
       </p:sp>
       <p:sp>
         <p:nvSpPr>
-          <p:cNvPr id="33" name="Text 31"/>
+          <p:cNvPr id="37" name="Text 35"/>
           <p:cNvSpPr/>
           <p:nvPr/>
         </p:nvSpPr>
@@ -34422,7 +34578,7 @@
       </p:sp>
       <p:sp>
         <p:nvSpPr>
-          <p:cNvPr id="34" name="Text 32"/>
+          <p:cNvPr id="38" name="Text 36"/>
           <p:cNvSpPr/>
           <p:nvPr/>
         </p:nvSpPr>
@@ -34478,7 +34634,7 @@
       </p:sp>
       <p:sp>
         <p:nvSpPr>
-          <p:cNvPr id="35" name="Shape 33"/>
+          <p:cNvPr id="39" name="Shape 37"/>
           <p:cNvSpPr/>
           <p:nvPr/>
         </p:nvSpPr>
@@ -34501,7 +34657,7 @@
       </p:sp>
       <p:sp>
         <p:nvSpPr>
-          <p:cNvPr id="36" name="Text 34"/>
+          <p:cNvPr id="40" name="Text 38"/>
           <p:cNvSpPr/>
           <p:nvPr/>
         </p:nvSpPr>
@@ -34540,7 +34696,7 @@
       </p:sp>
       <p:sp>
         <p:nvSpPr>
-          <p:cNvPr id="37" name="Shape 35"/>
+          <p:cNvPr id="41" name="Shape 39"/>
           <p:cNvSpPr/>
           <p:nvPr/>
         </p:nvSpPr>
@@ -34563,7 +34719,7 @@
       </p:sp>
       <p:sp>
         <p:nvSpPr>
-          <p:cNvPr id="38" name="Text 36"/>
+          <p:cNvPr id="42" name="Text 40"/>
           <p:cNvSpPr/>
           <p:nvPr/>
         </p:nvSpPr>

--- a/folletos/2026-04/pptx/FIP_VANTRUST_LIQUIDEZ_SENCILLO.pptx
+++ b/folletos/2026-04/pptx/FIP_VANTRUST_LIQUIDEZ_SENCILLO.pptx
@@ -6373,7 +6373,7 @@
                 <a:ea typeface="Calibri" pitchFamily="34" charset="-122"/>
                 <a:cs typeface="Calibri" pitchFamily="34" charset="-120"/>
               </a:rPr>
-              <a:t>prueba CLP</a:t>
+              <a:t>prueba 8 CLP</a:t>
             </a:r>
             <a:endParaRPr lang="en-US" sz="800" dirty="0"/>
           </a:p>

--- a/folletos/2026-04/pptx/FIP_VANTRUST_LIQUIDEZ_SENCILLO.pptx
+++ b/folletos/2026-04/pptx/FIP_VANTRUST_LIQUIDEZ_SENCILLO.pptx
@@ -3114,7 +3114,7 @@
                 <a:ea typeface="Calibri" pitchFamily="34" charset="-122"/>
                 <a:cs typeface="Calibri" pitchFamily="34" charset="-120"/>
               </a:rPr>
-              <a:t>prueba CLP</a:t>
+              <a:t>prueba 10 CLP</a:t>
             </a:r>
             <a:endParaRPr lang="en-US" sz="800" dirty="0"/>
           </a:p>

--- a/folletos/2026-04/pptx/FIP_VANTRUST_LIQUIDEZ_SENCILLO.pptx
+++ b/folletos/2026-04/pptx/FIP_VANTRUST_LIQUIDEZ_SENCILLO.pptx
@@ -3114,7 +3114,7 @@
                 <a:ea typeface="Calibri" pitchFamily="34" charset="-122"/>
                 <a:cs typeface="Calibri" pitchFamily="34" charset="-120"/>
               </a:rPr>
-              <a:t>prueba 10 CLP</a:t>
+              <a:t>prueba 11 CLP</a:t>
             </a:r>
             <a:endParaRPr lang="en-US" sz="800" dirty="0"/>
           </a:p>

--- a/folletos/2026-04/pptx/FIP_VANTRUST_LIQUIDEZ_SENCILLO.pptx
+++ b/folletos/2026-04/pptx/FIP_VANTRUST_LIQUIDEZ_SENCILLO.pptx
@@ -3131,7 +3131,7 @@
                 <a:ea typeface="Calibri" pitchFamily="34" charset="-122"/>
                 <a:cs typeface="Calibri" pitchFamily="34" charset="-120"/>
               </a:rPr>
-              <a:t>prueba CLP</a:t>
+              <a:t>prueba 11 CLP</a:t>
             </a:r>
             <a:endParaRPr lang="en-US" sz="800" dirty="0"/>
           </a:p>

--- a/folletos/2026-04/pptx/FIP_VANTRUST_LIQUIDEZ_SENCILLO.pptx
+++ b/folletos/2026-04/pptx/FIP_VANTRUST_LIQUIDEZ_SENCILLO.pptx
@@ -3131,7 +3131,7 @@
                 <a:ea typeface="Calibri" pitchFamily="34" charset="-122"/>
                 <a:cs typeface="Calibri" pitchFamily="34" charset="-120"/>
               </a:rPr>
-              <a:t>prueba 11 CLP</a:t>
+              <a:t>prueba 12 CLP</a:t>
             </a:r>
             <a:endParaRPr lang="en-US" sz="800" dirty="0"/>
           </a:p>

--- a/folletos/2026-04/pptx/FIP_VANTRUST_LIQUIDEZ_SENCILLO.pptx
+++ b/folletos/2026-04/pptx/FIP_VANTRUST_LIQUIDEZ_SENCILLO.pptx
@@ -3113,7 +3113,7 @@
                 <a:ea typeface="Calibri" pitchFamily="34" charset="-122"/>
                 <a:cs typeface="Calibri" pitchFamily="34" charset="-120"/>
               </a:rPr>
-              <a:t>prueba CLP</a:t>
+              <a:t>prueba 12 CLP</a:t>
             </a:r>
             <a:endParaRPr lang="en-US" sz="800" dirty="0"/>
           </a:p>

--- a/folletos/2026-04/pptx/FIP_VANTRUST_LIQUIDEZ_SENCILLO.pptx
+++ b/folletos/2026-04/pptx/FIP_VANTRUST_LIQUIDEZ_SENCILLO.pptx
@@ -3113,7 +3113,7 @@
                 <a:ea typeface="Calibri" pitchFamily="34" charset="-122"/>
                 <a:cs typeface="Calibri" pitchFamily="34" charset="-120"/>
               </a:rPr>
-              <a:t>prueba 12 CLP</a:t>
+              <a:t>prueba CLP</a:t>
             </a:r>
             <a:endParaRPr lang="en-US" sz="800" dirty="0"/>
           </a:p>
@@ -7663,7 +7663,7 @@
                           <a:ea typeface="Calibri" pitchFamily="34" charset="-122"/>
                           <a:cs typeface="Calibri" pitchFamily="34" charset="-120"/>
                         </a:rPr>
-                        <a:t>0.00%</a:t>
+                        <a:t>0.10%</a:t>
                       </a:r>
                       <a:endParaRPr lang="en-US" sz="500" dirty="0">
                         <a:latin typeface="Calibri" charset="0"/>
@@ -7793,7 +7793,7 @@
                           <a:ea typeface="Calibri" pitchFamily="34" charset="-122"/>
                           <a:cs typeface="Calibri" pitchFamily="34" charset="-120"/>
                         </a:rPr>
-                        <a:t>3.10%</a:t>
+                        <a:t>3.21%</a:t>
                       </a:r>
                       <a:endParaRPr lang="en-US" sz="500" dirty="0">
                         <a:latin typeface="Calibri" charset="0"/>
@@ -8519,7 +8519,7 @@
                           <a:ea typeface="Calibri" pitchFamily="34" charset="-122"/>
                           <a:cs typeface="Calibri" pitchFamily="34" charset="-120"/>
                         </a:rPr>
-                        <a:t>0.00%</a:t>
+                        <a:t>0.34%</a:t>
                       </a:r>
                       <a:endParaRPr lang="en-US" sz="500" dirty="0">
                         <a:latin typeface="Calibri" charset="0"/>
@@ -8584,7 +8584,7 @@
                           <a:ea typeface="Calibri" pitchFamily="34" charset="-122"/>
                           <a:cs typeface="Calibri" pitchFamily="34" charset="-120"/>
                         </a:rPr>
-                        <a:t>0.00%</a:t>
+                        <a:t>0.22%</a:t>
                       </a:r>
                       <a:endParaRPr lang="en-US" sz="500" dirty="0">
                         <a:latin typeface="Calibri" charset="0"/>
@@ -8649,7 +8649,7 @@
                           <a:ea typeface="Calibri" pitchFamily="34" charset="-122"/>
                           <a:cs typeface="Calibri" pitchFamily="34" charset="-120"/>
                         </a:rPr>
-                        <a:t>0.01%</a:t>
+                        <a:t>0.57%</a:t>
                       </a:r>
                       <a:endParaRPr lang="en-US" sz="500" dirty="0">
                         <a:latin typeface="Calibri" charset="0"/>
@@ -9877,7 +9877,7 @@
                           <a:ea typeface="Calibri" pitchFamily="34" charset="-122"/>
                           <a:cs typeface="Calibri" pitchFamily="34" charset="-120"/>
                         </a:rPr>
-                        <a:t>0.00%</a:t>
+                        <a:t>0.14%</a:t>
                       </a:r>
                       <a:endParaRPr lang="en-US" sz="500" dirty="0">
                         <a:latin typeface="Calibri" charset="0"/>
@@ -9942,7 +9942,7 @@
                           <a:ea typeface="Calibri" pitchFamily="34" charset="-122"/>
                           <a:cs typeface="Calibri" pitchFamily="34" charset="-120"/>
                         </a:rPr>
-                        <a:t>0.00%</a:t>
+                        <a:t>0.14%</a:t>
                       </a:r>
                       <a:endParaRPr lang="en-US" sz="500" dirty="0">
                         <a:latin typeface="Calibri" charset="0"/>
@@ -10007,7 +10007,7 @@
                           <a:ea typeface="Calibri" pitchFamily="34" charset="-122"/>
                           <a:cs typeface="Calibri" pitchFamily="34" charset="-120"/>
                         </a:rPr>
-                        <a:t>0.00%</a:t>
+                        <a:t>0.14%</a:t>
                       </a:r>
                       <a:endParaRPr lang="en-US" sz="500" dirty="0">
                         <a:latin typeface="Calibri" charset="0"/>
@@ -10072,7 +10072,7 @@
                           <a:ea typeface="Calibri" pitchFamily="34" charset="-122"/>
                           <a:cs typeface="Calibri" pitchFamily="34" charset="-120"/>
                         </a:rPr>
-                        <a:t>0.00%</a:t>
+                        <a:t>0.13%</a:t>
                       </a:r>
                       <a:endParaRPr lang="en-US" sz="500" dirty="0">
                         <a:latin typeface="Calibri" charset="0"/>
@@ -10137,7 +10137,7 @@
                           <a:ea typeface="Calibri" pitchFamily="34" charset="-122"/>
                           <a:cs typeface="Calibri" pitchFamily="34" charset="-120"/>
                         </a:rPr>
-                        <a:t>0.00%</a:t>
+                        <a:t>0.12%</a:t>
                       </a:r>
                       <a:endParaRPr lang="en-US" sz="500" dirty="0">
                         <a:latin typeface="Calibri" charset="0"/>
@@ -10202,7 +10202,7 @@
                           <a:ea typeface="Calibri" pitchFamily="34" charset="-122"/>
                           <a:cs typeface="Calibri" pitchFamily="34" charset="-120"/>
                         </a:rPr>
-                        <a:t>0.00%</a:t>
+                        <a:t>0.10%</a:t>
                       </a:r>
                       <a:endParaRPr lang="en-US" sz="500" dirty="0">
                         <a:latin typeface="Calibri" charset="0"/>
@@ -10267,7 +10267,7 @@
                           <a:ea typeface="Calibri" pitchFamily="34" charset="-122"/>
                           <a:cs typeface="Calibri" pitchFamily="34" charset="-120"/>
                         </a:rPr>
-                        <a:t>0.00%</a:t>
+                        <a:t>0.09%</a:t>
                       </a:r>
                       <a:endParaRPr lang="en-US" sz="500" dirty="0">
                         <a:latin typeface="Calibri" charset="0"/>
@@ -10332,7 +10332,7 @@
                           <a:ea typeface="Calibri" pitchFamily="34" charset="-122"/>
                           <a:cs typeface="Calibri" pitchFamily="34" charset="-120"/>
                         </a:rPr>
-                        <a:t>0.00%</a:t>
+                        <a:t>0.11%</a:t>
                       </a:r>
                       <a:endParaRPr lang="en-US" sz="500" dirty="0">
                         <a:latin typeface="Calibri" charset="0"/>
@@ -10397,7 +10397,7 @@
                           <a:ea typeface="Calibri" pitchFamily="34" charset="-122"/>
                           <a:cs typeface="Calibri" pitchFamily="34" charset="-120"/>
                         </a:rPr>
-                        <a:t>0.00%</a:t>
+                        <a:t>0.06%</a:t>
                       </a:r>
                       <a:endParaRPr lang="en-US" sz="500" dirty="0">
                         <a:latin typeface="Calibri" charset="0"/>
@@ -10462,7 +10462,7 @@
                           <a:ea typeface="Calibri" pitchFamily="34" charset="-122"/>
                           <a:cs typeface="Calibri" pitchFamily="34" charset="-120"/>
                         </a:rPr>
-                        <a:t>0.00%</a:t>
+                        <a:t>0.07%</a:t>
                       </a:r>
                       <a:endParaRPr lang="en-US" sz="500" dirty="0">
                         <a:latin typeface="Calibri" charset="0"/>
@@ -10592,7 +10592,7 @@
                           <a:ea typeface="Calibri" pitchFamily="34" charset="-122"/>
                           <a:cs typeface="Calibri" pitchFamily="34" charset="-120"/>
                         </a:rPr>
-                        <a:t>2.92%</a:t>
+                        <a:t>4.05%</a:t>
                       </a:r>
                       <a:endParaRPr lang="en-US" sz="500" dirty="0">
                         <a:latin typeface="Calibri" charset="0"/>
@@ -11048,7 +11048,7 @@
                           <a:ea typeface="Calibri" pitchFamily="34" charset="-122"/>
                           <a:cs typeface="Calibri" pitchFamily="34" charset="-120"/>
                         </a:rPr>
-                        <a:t>0.00%</a:t>
+                        <a:t>0.23%</a:t>
                       </a:r>
                       <a:endParaRPr lang="en-US" sz="500" dirty="0">
                         <a:latin typeface="Calibri" charset="0"/>
@@ -11113,7 +11113,7 @@
                           <a:ea typeface="Calibri" pitchFamily="34" charset="-122"/>
                           <a:cs typeface="Calibri" pitchFamily="34" charset="-120"/>
                         </a:rPr>
-                        <a:t>0.00%</a:t>
+                        <a:t>0.22%</a:t>
                       </a:r>
                       <a:endParaRPr lang="en-US" sz="500" dirty="0">
                         <a:latin typeface="Calibri" charset="0"/>
@@ -11178,7 +11178,7 @@
                           <a:ea typeface="Calibri" pitchFamily="34" charset="-122"/>
                           <a:cs typeface="Calibri" pitchFamily="34" charset="-120"/>
                         </a:rPr>
-                        <a:t>0.00%</a:t>
+                        <a:t>0.21%</a:t>
                       </a:r>
                       <a:endParaRPr lang="en-US" sz="500" dirty="0">
                         <a:latin typeface="Calibri" charset="0"/>
@@ -11243,7 +11243,7 @@
                           <a:ea typeface="Calibri" pitchFamily="34" charset="-122"/>
                           <a:cs typeface="Calibri" pitchFamily="34" charset="-120"/>
                         </a:rPr>
-                        <a:t>0.00%</a:t>
+                        <a:t>0.17%</a:t>
                       </a:r>
                       <a:endParaRPr lang="en-US" sz="500" dirty="0">
                         <a:latin typeface="Calibri" charset="0"/>
@@ -11308,7 +11308,7 @@
                           <a:ea typeface="Calibri" pitchFamily="34" charset="-122"/>
                           <a:cs typeface="Calibri" pitchFamily="34" charset="-120"/>
                         </a:rPr>
-                        <a:t>0.00%</a:t>
+                        <a:t>0.15%</a:t>
                       </a:r>
                       <a:endParaRPr lang="en-US" sz="500" dirty="0">
                         <a:latin typeface="Calibri" charset="0"/>
@@ -11373,7 +11373,7 @@
                           <a:ea typeface="Calibri" pitchFamily="34" charset="-122"/>
                           <a:cs typeface="Calibri" pitchFamily="34" charset="-120"/>
                         </a:rPr>
-                        <a:t>0.00%</a:t>
+                        <a:t>0.15%</a:t>
                       </a:r>
                       <a:endParaRPr lang="en-US" sz="500" dirty="0">
                         <a:latin typeface="Calibri" charset="0"/>
@@ -11438,7 +11438,7 @@
                           <a:ea typeface="Calibri" pitchFamily="34" charset="-122"/>
                           <a:cs typeface="Calibri" pitchFamily="34" charset="-120"/>
                         </a:rPr>
-                        <a:t>0.00%</a:t>
+                        <a:t>0.15%</a:t>
                       </a:r>
                       <a:endParaRPr lang="en-US" sz="500" dirty="0">
                         <a:latin typeface="Calibri" charset="0"/>
@@ -11503,7 +11503,7 @@
                           <a:ea typeface="Calibri" pitchFamily="34" charset="-122"/>
                           <a:cs typeface="Calibri" pitchFamily="34" charset="-120"/>
                         </a:rPr>
-                        <a:t>0.01%</a:t>
+                        <a:t>1.28%</a:t>
                       </a:r>
                       <a:endParaRPr lang="en-US" sz="500" dirty="0">
                         <a:latin typeface="Calibri" charset="0"/>
@@ -12731,7 +12731,7 @@
                           <a:ea typeface="Calibri" pitchFamily="34" charset="-122"/>
                           <a:cs typeface="Calibri" pitchFamily="34" charset="-120"/>
                         </a:rPr>
-                        <a:t>0.00%</a:t>
+                        <a:t>0.05%</a:t>
                       </a:r>
                       <a:endParaRPr lang="en-US" sz="500" dirty="0">
                         <a:latin typeface="Calibri" charset="0"/>
@@ -12796,7 +12796,7 @@
                           <a:ea typeface="Calibri" pitchFamily="34" charset="-122"/>
                           <a:cs typeface="Calibri" pitchFamily="34" charset="-120"/>
                         </a:rPr>
-                        <a:t>0.00%</a:t>
+                        <a:t>0.09%</a:t>
                       </a:r>
                       <a:endParaRPr lang="en-US" sz="500" dirty="0">
                         <a:latin typeface="Calibri" charset="0"/>
@@ -12861,7 +12861,7 @@
                           <a:ea typeface="Calibri" pitchFamily="34" charset="-122"/>
                           <a:cs typeface="Calibri" pitchFamily="34" charset="-120"/>
                         </a:rPr>
-                        <a:t>0.00%</a:t>
+                        <a:t>0.22%</a:t>
                       </a:r>
                       <a:endParaRPr lang="en-US" sz="500" dirty="0">
                         <a:latin typeface="Calibri" charset="0"/>
@@ -12926,7 +12926,7 @@
                           <a:ea typeface="Calibri" pitchFamily="34" charset="-122"/>
                           <a:cs typeface="Calibri" pitchFamily="34" charset="-120"/>
                         </a:rPr>
-                        <a:t>0.00%</a:t>
+                        <a:t>0.03%</a:t>
                       </a:r>
                       <a:endParaRPr lang="en-US" sz="500" dirty="0">
                         <a:latin typeface="Calibri" charset="0"/>
@@ -12991,7 +12991,7 @@
                           <a:ea typeface="Calibri" pitchFamily="34" charset="-122"/>
                           <a:cs typeface="Calibri" pitchFamily="34" charset="-120"/>
                         </a:rPr>
-                        <a:t>0.00%</a:t>
+                        <a:t>0.01%</a:t>
                       </a:r>
                       <a:endParaRPr lang="en-US" sz="500" dirty="0">
                         <a:latin typeface="Calibri" charset="0"/>
@@ -13056,7 +13056,7 @@
                           <a:ea typeface="Calibri" pitchFamily="34" charset="-122"/>
                           <a:cs typeface="Calibri" pitchFamily="34" charset="-120"/>
                         </a:rPr>
-                        <a:t>0.00%</a:t>
+                        <a:t>0.01%</a:t>
                       </a:r>
                       <a:endParaRPr lang="en-US" sz="500" dirty="0">
                         <a:latin typeface="Calibri" charset="0"/>
@@ -13121,7 +13121,7 @@
                           <a:ea typeface="Calibri" pitchFamily="34" charset="-122"/>
                           <a:cs typeface="Calibri" pitchFamily="34" charset="-120"/>
                         </a:rPr>
-                        <a:t>0.00%</a:t>
+                        <a:t>0.01%</a:t>
                       </a:r>
                       <a:endParaRPr lang="en-US" sz="500" dirty="0">
                         <a:latin typeface="Calibri" charset="0"/>
@@ -13186,7 +13186,7 @@
                           <a:ea typeface="Calibri" pitchFamily="34" charset="-122"/>
                           <a:cs typeface="Calibri" pitchFamily="34" charset="-120"/>
                         </a:rPr>
-                        <a:t>0.00%</a:t>
+                        <a:t>0.01%</a:t>
                       </a:r>
                       <a:endParaRPr lang="en-US" sz="500" dirty="0">
                         <a:latin typeface="Calibri" charset="0"/>
@@ -13251,7 +13251,7 @@
                           <a:ea typeface="Calibri" pitchFamily="34" charset="-122"/>
                           <a:cs typeface="Calibri" pitchFamily="34" charset="-120"/>
                         </a:rPr>
-                        <a:t>0.00%</a:t>
+                        <a:t>0.01%</a:t>
                       </a:r>
                       <a:endParaRPr lang="en-US" sz="500" dirty="0">
                         <a:latin typeface="Calibri" charset="0"/>
@@ -13316,7 +13316,7 @@
                           <a:ea typeface="Calibri" pitchFamily="34" charset="-122"/>
                           <a:cs typeface="Calibri" pitchFamily="34" charset="-120"/>
                         </a:rPr>
-                        <a:t>0.00%</a:t>
+                        <a:t>0.01%</a:t>
                       </a:r>
                       <a:endParaRPr lang="en-US" sz="500" dirty="0">
                         <a:latin typeface="Calibri" charset="0"/>
@@ -13446,7 +13446,7 @@
                           <a:ea typeface="Calibri" pitchFamily="34" charset="-122"/>
                           <a:cs typeface="Calibri" pitchFamily="34" charset="-120"/>
                         </a:rPr>
-                        <a:t>0.89%</a:t>
+                        <a:t>1.33%</a:t>
                       </a:r>
                       <a:endParaRPr lang="en-US" sz="500" dirty="0">
                         <a:latin typeface="Calibri" charset="0"/>
@@ -13632,7 +13632,7 @@
                           <a:ea typeface="Calibri" pitchFamily="34" charset="-122"/>
                           <a:cs typeface="Calibri" pitchFamily="34" charset="-120"/>
                         </a:rPr>
-                        <a:t>0.00%</a:t>
+                        <a:t>0.13%</a:t>
                       </a:r>
                       <a:endParaRPr lang="en-US" sz="500" dirty="0">
                         <a:latin typeface="Calibri" charset="0"/>
@@ -13697,7 +13697,7 @@
                           <a:ea typeface="Calibri" pitchFamily="34" charset="-122"/>
                           <a:cs typeface="Calibri" pitchFamily="34" charset="-120"/>
                         </a:rPr>
-                        <a:t>0.00%</a:t>
+                        <a:t>0.12%</a:t>
                       </a:r>
                       <a:endParaRPr lang="en-US" sz="500" dirty="0">
                         <a:latin typeface="Calibri" charset="0"/>
@@ -13762,7 +13762,7 @@
                           <a:ea typeface="Calibri" pitchFamily="34" charset="-122"/>
                           <a:cs typeface="Calibri" pitchFamily="34" charset="-120"/>
                         </a:rPr>
-                        <a:t>0.00%</a:t>
+                        <a:t>0.12%</a:t>
                       </a:r>
                       <a:endParaRPr lang="en-US" sz="500" dirty="0">
                         <a:latin typeface="Calibri" charset="0"/>
@@ -13827,7 +13827,7 @@
                           <a:ea typeface="Calibri" pitchFamily="34" charset="-122"/>
                           <a:cs typeface="Calibri" pitchFamily="34" charset="-120"/>
                         </a:rPr>
-                        <a:t>0.00%</a:t>
+                        <a:t>0.11%</a:t>
                       </a:r>
                       <a:endParaRPr lang="en-US" sz="500" dirty="0">
                         <a:latin typeface="Calibri" charset="0"/>
@@ -13892,7 +13892,7 @@
                           <a:ea typeface="Calibri" pitchFamily="34" charset="-122"/>
                           <a:cs typeface="Calibri" pitchFamily="34" charset="-120"/>
                         </a:rPr>
-                        <a:t>0.00%</a:t>
+                        <a:t>0.11%</a:t>
                       </a:r>
                       <a:endParaRPr lang="en-US" sz="500" dirty="0">
                         <a:latin typeface="Calibri" charset="0"/>
@@ -13957,7 +13957,7 @@
                           <a:ea typeface="Calibri" pitchFamily="34" charset="-122"/>
                           <a:cs typeface="Calibri" pitchFamily="34" charset="-120"/>
                         </a:rPr>
-                        <a:t>0.00%</a:t>
+                        <a:t>0.09%</a:t>
                       </a:r>
                       <a:endParaRPr lang="en-US" sz="500" dirty="0">
                         <a:latin typeface="Calibri" charset="0"/>
@@ -14022,7 +14022,7 @@
                           <a:ea typeface="Calibri" pitchFamily="34" charset="-122"/>
                           <a:cs typeface="Calibri" pitchFamily="34" charset="-120"/>
                         </a:rPr>
-                        <a:t>0.00%</a:t>
+                        <a:t>0.04%</a:t>
                       </a:r>
                       <a:endParaRPr lang="en-US" sz="500" dirty="0">
                         <a:latin typeface="Calibri" charset="0"/>
@@ -14087,7 +14087,7 @@
                           <a:ea typeface="Calibri" pitchFamily="34" charset="-122"/>
                           <a:cs typeface="Calibri" pitchFamily="34" charset="-120"/>
                         </a:rPr>
-                        <a:t>0.00%</a:t>
+                        <a:t>0.06%</a:t>
                       </a:r>
                       <a:endParaRPr lang="en-US" sz="500" dirty="0">
                         <a:latin typeface="Calibri" charset="0"/>
@@ -14152,7 +14152,7 @@
                           <a:ea typeface="Calibri" pitchFamily="34" charset="-122"/>
                           <a:cs typeface="Calibri" pitchFamily="34" charset="-120"/>
                         </a:rPr>
-                        <a:t>0.00%</a:t>
+                        <a:t>0.04%</a:t>
                       </a:r>
                       <a:endParaRPr lang="en-US" sz="500" dirty="0">
                         <a:latin typeface="Calibri" charset="0"/>
@@ -14217,7 +14217,7 @@
                           <a:ea typeface="Calibri" pitchFamily="34" charset="-122"/>
                           <a:cs typeface="Calibri" pitchFamily="34" charset="-120"/>
                         </a:rPr>
-                        <a:t>0.00%</a:t>
+                        <a:t>0.09%</a:t>
                       </a:r>
                       <a:endParaRPr lang="en-US" sz="500" dirty="0">
                         <a:latin typeface="Calibri" charset="0"/>
@@ -14282,7 +14282,7 @@
                           <a:ea typeface="Calibri" pitchFamily="34" charset="-122"/>
                           <a:cs typeface="Calibri" pitchFamily="34" charset="-120"/>
                         </a:rPr>
-                        <a:t>0.00%</a:t>
+                        <a:t>0.07%</a:t>
                       </a:r>
                       <a:endParaRPr lang="en-US" sz="500" dirty="0">
                         <a:latin typeface="Calibri" charset="0"/>
@@ -14347,7 +14347,7 @@
                           <a:ea typeface="Calibri" pitchFamily="34" charset="-122"/>
                           <a:cs typeface="Calibri" pitchFamily="34" charset="-120"/>
                         </a:rPr>
-                        <a:t>0.01%</a:t>
+                        <a:t>0.84%</a:t>
                       </a:r>
                       <a:endParaRPr lang="en-US" sz="500" dirty="0">
                         <a:latin typeface="Calibri" charset="0"/>
@@ -14412,7 +14412,7 @@
                           <a:ea typeface="Calibri" pitchFamily="34" charset="-122"/>
                           <a:cs typeface="Calibri" pitchFamily="34" charset="-120"/>
                         </a:rPr>
-                        <a:t>0.02%</a:t>
+                        <a:t>1.82%</a:t>
                       </a:r>
                       <a:endParaRPr lang="en-US" sz="500" dirty="0">
                         <a:latin typeface="Calibri" charset="0"/>
@@ -15640,7 +15640,7 @@
                           <a:ea typeface="Calibri" pitchFamily="34" charset="-122"/>
                           <a:cs typeface="Calibri" pitchFamily="34" charset="-120"/>
                         </a:rPr>
-                        <a:t>0.00%</a:t>
+                        <a:t>0.01%</a:t>
                       </a:r>
                       <a:endParaRPr lang="en-US" sz="500" dirty="0">
                         <a:latin typeface="Calibri" charset="0"/>
@@ -15705,7 +15705,7 @@
                           <a:ea typeface="Calibri" pitchFamily="34" charset="-122"/>
                           <a:cs typeface="Calibri" pitchFamily="34" charset="-120"/>
                         </a:rPr>
-                        <a:t>0.00%</a:t>
+                        <a:t>0.01%</a:t>
                       </a:r>
                       <a:endParaRPr lang="en-US" sz="500" dirty="0">
                         <a:latin typeface="Calibri" charset="0"/>
@@ -15770,7 +15770,7 @@
                           <a:ea typeface="Calibri" pitchFamily="34" charset="-122"/>
                           <a:cs typeface="Calibri" pitchFamily="34" charset="-120"/>
                         </a:rPr>
-                        <a:t>0.00%</a:t>
+                        <a:t>0.01%</a:t>
                       </a:r>
                       <a:endParaRPr lang="en-US" sz="500" dirty="0">
                         <a:latin typeface="Calibri" charset="0"/>
@@ -15835,7 +15835,7 @@
                           <a:ea typeface="Calibri" pitchFamily="34" charset="-122"/>
                           <a:cs typeface="Calibri" pitchFamily="34" charset="-120"/>
                         </a:rPr>
-                        <a:t>0.00%</a:t>
+                        <a:t>0.01%</a:t>
                       </a:r>
                       <a:endParaRPr lang="en-US" sz="500" dirty="0">
                         <a:latin typeface="Calibri" charset="0"/>
@@ -15900,7 +15900,7 @@
                           <a:ea typeface="Calibri" pitchFamily="34" charset="-122"/>
                           <a:cs typeface="Calibri" pitchFamily="34" charset="-120"/>
                         </a:rPr>
-                        <a:t>0.00%</a:t>
+                        <a:t>0.01%</a:t>
                       </a:r>
                       <a:endParaRPr lang="en-US" sz="500" dirty="0">
                         <a:latin typeface="Calibri" charset="0"/>
@@ -15965,7 +15965,7 @@
                           <a:ea typeface="Calibri" pitchFamily="34" charset="-122"/>
                           <a:cs typeface="Calibri" pitchFamily="34" charset="-120"/>
                         </a:rPr>
-                        <a:t>0.00%</a:t>
+                        <a:t>0.01%</a:t>
                       </a:r>
                       <a:endParaRPr lang="en-US" sz="500" dirty="0">
                         <a:latin typeface="Calibri" charset="0"/>
@@ -16030,7 +16030,7 @@
                           <a:ea typeface="Calibri" pitchFamily="34" charset="-122"/>
                           <a:cs typeface="Calibri" pitchFamily="34" charset="-120"/>
                         </a:rPr>
-                        <a:t>0.00%</a:t>
+                        <a:t>0.01%</a:t>
                       </a:r>
                       <a:endParaRPr lang="en-US" sz="500" dirty="0">
                         <a:latin typeface="Calibri" charset="0"/>
@@ -16095,7 +16095,7 @@
                           <a:ea typeface="Calibri" pitchFamily="34" charset="-122"/>
                           <a:cs typeface="Calibri" pitchFamily="34" charset="-120"/>
                         </a:rPr>
-                        <a:t>-0.00%</a:t>
+                        <a:t>-0.01%</a:t>
                       </a:r>
                       <a:endParaRPr lang="en-US" sz="500" dirty="0">
                         <a:latin typeface="Calibri" charset="0"/>
@@ -16160,7 +16160,7 @@
                           <a:ea typeface="Calibri" pitchFamily="34" charset="-122"/>
                           <a:cs typeface="Calibri" pitchFamily="34" charset="-120"/>
                         </a:rPr>
-                        <a:t>0.00%</a:t>
+                        <a:t>0.10%</a:t>
                       </a:r>
                       <a:endParaRPr lang="en-US" sz="500" dirty="0">
                         <a:latin typeface="Calibri" charset="0"/>
@@ -16225,7 +16225,7 @@
                           <a:ea typeface="Calibri" pitchFamily="34" charset="-122"/>
                           <a:cs typeface="Calibri" pitchFamily="34" charset="-120"/>
                         </a:rPr>
-                        <a:t>0.00%</a:t>
+                        <a:t>0.13%</a:t>
                       </a:r>
                       <a:endParaRPr lang="en-US" sz="500" dirty="0">
                         <a:latin typeface="Calibri" charset="0"/>
@@ -16355,7 +16355,7 @@
                           <a:ea typeface="Calibri" pitchFamily="34" charset="-122"/>
                           <a:cs typeface="Calibri" pitchFamily="34" charset="-120"/>
                         </a:rPr>
-                        <a:t>0.60%</a:t>
+                        <a:t>0.85%</a:t>
                       </a:r>
                       <a:endParaRPr lang="en-US" sz="500" dirty="0">
                         <a:latin typeface="Calibri" charset="0"/>
@@ -16541,7 +16541,7 @@
                           <a:ea typeface="Calibri" pitchFamily="34" charset="-122"/>
                           <a:cs typeface="Calibri" pitchFamily="34" charset="-120"/>
                         </a:rPr>
-                        <a:t>0.00%</a:t>
+                        <a:t>0.02%</a:t>
                       </a:r>
                       <a:endParaRPr lang="en-US" sz="500" dirty="0">
                         <a:latin typeface="Calibri" charset="0"/>
@@ -16606,7 +16606,7 @@
                           <a:ea typeface="Calibri" pitchFamily="34" charset="-122"/>
                           <a:cs typeface="Calibri" pitchFamily="34" charset="-120"/>
                         </a:rPr>
-                        <a:t>0.00%</a:t>
+                        <a:t>0.07%</a:t>
                       </a:r>
                       <a:endParaRPr lang="en-US" sz="500" dirty="0">
                         <a:latin typeface="Calibri" charset="0"/>
@@ -16671,7 +16671,7 @@
                           <a:ea typeface="Calibri" pitchFamily="34" charset="-122"/>
                           <a:cs typeface="Calibri" pitchFamily="34" charset="-120"/>
                         </a:rPr>
-                        <a:t>0.00%</a:t>
+                        <a:t>0.04%</a:t>
                       </a:r>
                       <a:endParaRPr lang="en-US" sz="500" dirty="0">
                         <a:latin typeface="Calibri" charset="0"/>
@@ -16736,7 +16736,7 @@
                           <a:ea typeface="Calibri" pitchFamily="34" charset="-122"/>
                           <a:cs typeface="Calibri" pitchFamily="34" charset="-120"/>
                         </a:rPr>
-                        <a:t>0.00%</a:t>
+                        <a:t>0.04%</a:t>
                       </a:r>
                       <a:endParaRPr lang="en-US" sz="500" dirty="0">
                         <a:latin typeface="Calibri" charset="0"/>
@@ -16801,7 +16801,7 @@
                           <a:ea typeface="Calibri" pitchFamily="34" charset="-122"/>
                           <a:cs typeface="Calibri" pitchFamily="34" charset="-120"/>
                         </a:rPr>
-                        <a:t>0.00%</a:t>
+                        <a:t>0.13%</a:t>
                       </a:r>
                       <a:endParaRPr lang="en-US" sz="500" dirty="0">
                         <a:latin typeface="Calibri" charset="0"/>
@@ -16866,7 +16866,7 @@
                           <a:ea typeface="Calibri" pitchFamily="34" charset="-122"/>
                           <a:cs typeface="Calibri" pitchFamily="34" charset="-120"/>
                         </a:rPr>
-                        <a:t>0.00%</a:t>
+                        <a:t>0.12%</a:t>
                       </a:r>
                       <a:endParaRPr lang="en-US" sz="500" dirty="0">
                         <a:latin typeface="Calibri" charset="0"/>
@@ -16931,7 +16931,7 @@
                           <a:ea typeface="Calibri" pitchFamily="34" charset="-122"/>
                           <a:cs typeface="Calibri" pitchFamily="34" charset="-120"/>
                         </a:rPr>
-                        <a:t>0.00%</a:t>
+                        <a:t>0.09%</a:t>
                       </a:r>
                       <a:endParaRPr lang="en-US" sz="500" dirty="0">
                         <a:latin typeface="Calibri" charset="0"/>
@@ -16996,7 +16996,7 @@
                           <a:ea typeface="Calibri" pitchFamily="34" charset="-122"/>
                           <a:cs typeface="Calibri" pitchFamily="34" charset="-120"/>
                         </a:rPr>
-                        <a:t>0.00%</a:t>
+                        <a:t>0.09%</a:t>
                       </a:r>
                       <a:endParaRPr lang="en-US" sz="500" dirty="0">
                         <a:latin typeface="Calibri" charset="0"/>
@@ -17061,7 +17061,7 @@
                           <a:ea typeface="Calibri" pitchFamily="34" charset="-122"/>
                           <a:cs typeface="Calibri" pitchFamily="34" charset="-120"/>
                         </a:rPr>
-                        <a:t>0.00%</a:t>
+                        <a:t>0.07%</a:t>
                       </a:r>
                       <a:endParaRPr lang="en-US" sz="500" dirty="0">
                         <a:latin typeface="Calibri" charset="0"/>
@@ -17126,7 +17126,7 @@
                           <a:ea typeface="Calibri" pitchFamily="34" charset="-122"/>
                           <a:cs typeface="Calibri" pitchFamily="34" charset="-120"/>
                         </a:rPr>
-                        <a:t>0.00%</a:t>
+                        <a:t>0.06%</a:t>
                       </a:r>
                       <a:endParaRPr lang="en-US" sz="500" dirty="0">
                         <a:latin typeface="Calibri" charset="0"/>
@@ -17191,7 +17191,7 @@
                           <a:ea typeface="Calibri" pitchFamily="34" charset="-122"/>
                           <a:cs typeface="Calibri" pitchFamily="34" charset="-120"/>
                         </a:rPr>
-                        <a:t>0.00%</a:t>
+                        <a:t>0.17%</a:t>
                       </a:r>
                       <a:endParaRPr lang="en-US" sz="500" dirty="0">
                         <a:latin typeface="Calibri" charset="0"/>
@@ -17256,7 +17256,7 @@
                           <a:ea typeface="Calibri" pitchFamily="34" charset="-122"/>
                           <a:cs typeface="Calibri" pitchFamily="34" charset="-120"/>
                         </a:rPr>
-                        <a:t>0.00%</a:t>
+                        <a:t>0.18%</a:t>
                       </a:r>
                       <a:endParaRPr lang="en-US" sz="500" dirty="0">
                         <a:latin typeface="Calibri" charset="0"/>
@@ -17321,7 +17321,7 @@
                           <a:ea typeface="Calibri" pitchFamily="34" charset="-122"/>
                           <a:cs typeface="Calibri" pitchFamily="34" charset="-120"/>
                         </a:rPr>
-                        <a:t>0.01%</a:t>
+                        <a:t>1.07%</a:t>
                       </a:r>
                       <a:endParaRPr lang="en-US" sz="500" dirty="0">
                         <a:latin typeface="Calibri" charset="0"/>
@@ -18549,7 +18549,7 @@
                           <a:ea typeface="Calibri" pitchFamily="34" charset="-122"/>
                           <a:cs typeface="Calibri" pitchFamily="34" charset="-120"/>
                         </a:rPr>
-                        <a:t>0.00%</a:t>
+                        <a:t>0.35%</a:t>
                       </a:r>
                       <a:endParaRPr lang="en-US" sz="500" dirty="0">
                         <a:latin typeface="Calibri" charset="0"/>
@@ -18614,7 +18614,7 @@
                           <a:ea typeface="Calibri" pitchFamily="34" charset="-122"/>
                           <a:cs typeface="Calibri" pitchFamily="34" charset="-120"/>
                         </a:rPr>
-                        <a:t>0.00%</a:t>
+                        <a:t>0.37%</a:t>
                       </a:r>
                       <a:endParaRPr lang="en-US" sz="500" dirty="0">
                         <a:latin typeface="Calibri" charset="0"/>
@@ -18679,7 +18679,7 @@
                           <a:ea typeface="Calibri" pitchFamily="34" charset="-122"/>
                           <a:cs typeface="Calibri" pitchFamily="34" charset="-120"/>
                         </a:rPr>
-                        <a:t>0.00%</a:t>
+                        <a:t>0.46%</a:t>
                       </a:r>
                       <a:endParaRPr lang="en-US" sz="500" dirty="0">
                         <a:latin typeface="Calibri" charset="0"/>
@@ -18744,7 +18744,7 @@
                           <a:ea typeface="Calibri" pitchFamily="34" charset="-122"/>
                           <a:cs typeface="Calibri" pitchFamily="34" charset="-120"/>
                         </a:rPr>
-                        <a:t>0.01%</a:t>
+                        <a:t>0.53%</a:t>
                       </a:r>
                       <a:endParaRPr lang="en-US" sz="500" dirty="0">
                         <a:latin typeface="Calibri" charset="0"/>
@@ -18809,7 +18809,7 @@
                           <a:ea typeface="Calibri" pitchFamily="34" charset="-122"/>
                           <a:cs typeface="Calibri" pitchFamily="34" charset="-120"/>
                         </a:rPr>
-                        <a:t>0.01%</a:t>
+                        <a:t>0.59%</a:t>
                       </a:r>
                       <a:endParaRPr lang="en-US" sz="500" dirty="0">
                         <a:latin typeface="Calibri" charset="0"/>
@@ -18874,7 +18874,7 @@
                           <a:ea typeface="Calibri" pitchFamily="34" charset="-122"/>
                           <a:cs typeface="Calibri" pitchFamily="34" charset="-120"/>
                         </a:rPr>
-                        <a:t>0.01%</a:t>
+                        <a:t>0.63%</a:t>
                       </a:r>
                       <a:endParaRPr lang="en-US" sz="500" dirty="0">
                         <a:latin typeface="Calibri" charset="0"/>
@@ -18939,7 +18939,7 @@
                           <a:ea typeface="Calibri" pitchFamily="34" charset="-122"/>
                           <a:cs typeface="Calibri" pitchFamily="34" charset="-120"/>
                         </a:rPr>
-                        <a:t>0.01%</a:t>
+                        <a:t>0.68%</a:t>
                       </a:r>
                       <a:endParaRPr lang="en-US" sz="500" dirty="0">
                         <a:latin typeface="Calibri" charset="0"/>
@@ -19004,7 +19004,7 @@
                           <a:ea typeface="Calibri" pitchFamily="34" charset="-122"/>
                           <a:cs typeface="Calibri" pitchFamily="34" charset="-120"/>
                         </a:rPr>
-                        <a:t>0.01%</a:t>
+                        <a:t>0.73%</a:t>
                       </a:r>
                       <a:endParaRPr lang="en-US" sz="500" dirty="0">
                         <a:latin typeface="Calibri" charset="0"/>
@@ -19069,7 +19069,7 @@
                           <a:ea typeface="Calibri" pitchFamily="34" charset="-122"/>
                           <a:cs typeface="Calibri" pitchFamily="34" charset="-120"/>
                         </a:rPr>
-                        <a:t>0.01%</a:t>
+                        <a:t>0.78%</a:t>
                       </a:r>
                       <a:endParaRPr lang="en-US" sz="500" dirty="0">
                         <a:latin typeface="Calibri" charset="0"/>
@@ -19134,7 +19134,7 @@
                           <a:ea typeface="Calibri" pitchFamily="34" charset="-122"/>
                           <a:cs typeface="Calibri" pitchFamily="34" charset="-120"/>
                         </a:rPr>
-                        <a:t>0.01%</a:t>
+                        <a:t>0.79%</a:t>
                       </a:r>
                       <a:endParaRPr lang="en-US" sz="500" dirty="0">
                         <a:latin typeface="Calibri" charset="0"/>
@@ -19264,7 +19264,7 @@
                           <a:ea typeface="Calibri" pitchFamily="34" charset="-122"/>
                           <a:cs typeface="Calibri" pitchFamily="34" charset="-120"/>
                         </a:rPr>
-                        <a:t>8.50%</a:t>
+                        <a:t>15.02%</a:t>
                       </a:r>
                       <a:endParaRPr lang="en-US" sz="500" dirty="0">
                         <a:latin typeface="Calibri" charset="0"/>
@@ -19450,7 +19450,7 @@
                           <a:ea typeface="Calibri" pitchFamily="34" charset="-122"/>
                           <a:cs typeface="Calibri" pitchFamily="34" charset="-120"/>
                         </a:rPr>
-                        <a:t>0.00%</a:t>
+                        <a:t>0.22%</a:t>
                       </a:r>
                       <a:endParaRPr lang="en-US" sz="500" dirty="0">
                         <a:latin typeface="Calibri" charset="0"/>
@@ -19515,7 +19515,7 @@
                           <a:ea typeface="Calibri" pitchFamily="34" charset="-122"/>
                           <a:cs typeface="Calibri" pitchFamily="34" charset="-120"/>
                         </a:rPr>
-                        <a:t>0.00%</a:t>
+                        <a:t>0.39%</a:t>
                       </a:r>
                       <a:endParaRPr lang="en-US" sz="500" dirty="0">
                         <a:latin typeface="Calibri" charset="0"/>
@@ -19580,7 +19580,7 @@
                           <a:ea typeface="Calibri" pitchFamily="34" charset="-122"/>
                           <a:cs typeface="Calibri" pitchFamily="34" charset="-120"/>
                         </a:rPr>
-                        <a:t>0.00%</a:t>
+                        <a:t>0.41%</a:t>
                       </a:r>
                       <a:endParaRPr lang="en-US" sz="500" dirty="0">
                         <a:latin typeface="Calibri" charset="0"/>
@@ -19645,7 +19645,7 @@
                           <a:ea typeface="Calibri" pitchFamily="34" charset="-122"/>
                           <a:cs typeface="Calibri" pitchFamily="34" charset="-120"/>
                         </a:rPr>
-                        <a:t>0.01%</a:t>
+                        <a:t>0.54%</a:t>
                       </a:r>
                       <a:endParaRPr lang="en-US" sz="500" dirty="0">
                         <a:latin typeface="Calibri" charset="0"/>
@@ -19710,7 +19710,7 @@
                           <a:ea typeface="Calibri" pitchFamily="34" charset="-122"/>
                           <a:cs typeface="Calibri" pitchFamily="34" charset="-120"/>
                         </a:rPr>
-                        <a:t>0.01%</a:t>
+                        <a:t>0.64%</a:t>
                       </a:r>
                       <a:endParaRPr lang="en-US" sz="500" dirty="0">
                         <a:latin typeface="Calibri" charset="0"/>
@@ -19775,7 +19775,7 @@
                           <a:ea typeface="Calibri" pitchFamily="34" charset="-122"/>
                           <a:cs typeface="Calibri" pitchFamily="34" charset="-120"/>
                         </a:rPr>
-                        <a:t>0.01%</a:t>
+                        <a:t>0.72%</a:t>
                       </a:r>
                       <a:endParaRPr lang="en-US" sz="500" dirty="0">
                         <a:latin typeface="Calibri" charset="0"/>
@@ -19840,7 +19840,7 @@
                           <a:ea typeface="Calibri" pitchFamily="34" charset="-122"/>
                           <a:cs typeface="Calibri" pitchFamily="34" charset="-120"/>
                         </a:rPr>
-                        <a:t>0.01%</a:t>
+                        <a:t>0.71%</a:t>
                       </a:r>
                       <a:endParaRPr lang="en-US" sz="500" dirty="0">
                         <a:latin typeface="Calibri" charset="0"/>
@@ -19905,7 +19905,7 @@
                           <a:ea typeface="Calibri" pitchFamily="34" charset="-122"/>
                           <a:cs typeface="Calibri" pitchFamily="34" charset="-120"/>
                         </a:rPr>
-                        <a:t>0.01%</a:t>
+                        <a:t>0.71%</a:t>
                       </a:r>
                       <a:endParaRPr lang="en-US" sz="500" dirty="0">
                         <a:latin typeface="Calibri" charset="0"/>
@@ -19970,7 +19970,7 @@
                           <a:ea typeface="Calibri" pitchFamily="34" charset="-122"/>
                           <a:cs typeface="Calibri" pitchFamily="34" charset="-120"/>
                         </a:rPr>
-                        <a:t>0.01%</a:t>
+                        <a:t>0.81%</a:t>
                       </a:r>
                       <a:endParaRPr lang="en-US" sz="500" dirty="0">
                         <a:latin typeface="Calibri" charset="0"/>
@@ -20035,7 +20035,7 @@
                           <a:ea typeface="Calibri" pitchFamily="34" charset="-122"/>
                           <a:cs typeface="Calibri" pitchFamily="34" charset="-120"/>
                         </a:rPr>
-                        <a:t>0.01%</a:t>
+                        <a:t>0.90%</a:t>
                       </a:r>
                       <a:endParaRPr lang="en-US" sz="500" dirty="0">
                         <a:latin typeface="Calibri" charset="0"/>
@@ -20100,7 +20100,7 @@
                           <a:ea typeface="Calibri" pitchFamily="34" charset="-122"/>
                           <a:cs typeface="Calibri" pitchFamily="34" charset="-120"/>
                         </a:rPr>
-                        <a:t>0.01%</a:t>
+                        <a:t>0.90%</a:t>
                       </a:r>
                       <a:endParaRPr lang="en-US" sz="500" dirty="0">
                         <a:latin typeface="Calibri" charset="0"/>
@@ -20165,7 +20165,7 @@
                           <a:ea typeface="Calibri" pitchFamily="34" charset="-122"/>
                           <a:cs typeface="Calibri" pitchFamily="34" charset="-120"/>
                         </a:rPr>
-                        <a:t>0.01%</a:t>
+                        <a:t>0.96%</a:t>
                       </a:r>
                       <a:endParaRPr lang="en-US" sz="500" dirty="0">
                         <a:latin typeface="Calibri" charset="0"/>
@@ -20230,7 +20230,7 @@
                           <a:ea typeface="Calibri" pitchFamily="34" charset="-122"/>
                           <a:cs typeface="Calibri" pitchFamily="34" charset="-120"/>
                         </a:rPr>
-                        <a:t>0.08%</a:t>
+                        <a:t>8.21%</a:t>
                       </a:r>
                       <a:endParaRPr lang="en-US" sz="500" dirty="0">
                         <a:latin typeface="Calibri" charset="0"/>
@@ -21458,7 +21458,7 @@
                           <a:ea typeface="Calibri" pitchFamily="34" charset="-122"/>
                           <a:cs typeface="Calibri" pitchFamily="34" charset="-120"/>
                         </a:rPr>
-                        <a:t>0.01%</a:t>
+                        <a:t>0.79%</a:t>
                       </a:r>
                       <a:endParaRPr lang="en-US" sz="500" dirty="0">
                         <a:latin typeface="Calibri" charset="0"/>
@@ -21523,7 +21523,7 @@
                           <a:ea typeface="Calibri" pitchFamily="34" charset="-122"/>
                           <a:cs typeface="Calibri" pitchFamily="34" charset="-120"/>
                         </a:rPr>
-                        <a:t>0.01%</a:t>
+                        <a:t>0.79%</a:t>
                       </a:r>
                       <a:endParaRPr lang="en-US" sz="500" dirty="0">
                         <a:latin typeface="Calibri" charset="0"/>
@@ -21588,7 +21588,7 @@
                           <a:ea typeface="Calibri" pitchFamily="34" charset="-122"/>
                           <a:cs typeface="Calibri" pitchFamily="34" charset="-120"/>
                         </a:rPr>
-                        <a:t>0.01%</a:t>
+                        <a:t>0.80%</a:t>
                       </a:r>
                       <a:endParaRPr lang="en-US" sz="500" dirty="0">
                         <a:latin typeface="Calibri" charset="0"/>
@@ -21653,7 +21653,7 @@
                           <a:ea typeface="Calibri" pitchFamily="34" charset="-122"/>
                           <a:cs typeface="Calibri" pitchFamily="34" charset="-120"/>
                         </a:rPr>
-                        <a:t>0.01%</a:t>
+                        <a:t>0.80%</a:t>
                       </a:r>
                       <a:endParaRPr lang="en-US" sz="500" dirty="0">
                         <a:latin typeface="Calibri" charset="0"/>
@@ -21718,7 +21718,7 @@
                           <a:ea typeface="Calibri" pitchFamily="34" charset="-122"/>
                           <a:cs typeface="Calibri" pitchFamily="34" charset="-120"/>
                         </a:rPr>
-                        <a:t>0.01%</a:t>
+                        <a:t>0.80%</a:t>
                       </a:r>
                       <a:endParaRPr lang="en-US" sz="500" dirty="0">
                         <a:latin typeface="Calibri" charset="0"/>
@@ -21783,7 +21783,7 @@
                           <a:ea typeface="Calibri" pitchFamily="34" charset="-122"/>
                           <a:cs typeface="Calibri" pitchFamily="34" charset="-120"/>
                         </a:rPr>
-                        <a:t>0.01%</a:t>
+                        <a:t>0.79%</a:t>
                       </a:r>
                       <a:endParaRPr lang="en-US" sz="500" dirty="0">
                         <a:latin typeface="Calibri" charset="0"/>
@@ -21848,7 +21848,7 @@
                           <a:ea typeface="Calibri" pitchFamily="34" charset="-122"/>
                           <a:cs typeface="Calibri" pitchFamily="34" charset="-120"/>
                         </a:rPr>
-                        <a:t>0.01%</a:t>
+                        <a:t>0.74%</a:t>
                       </a:r>
                       <a:endParaRPr lang="en-US" sz="500" dirty="0">
                         <a:latin typeface="Calibri" charset="0"/>
@@ -21913,7 +21913,7 @@
                           <a:ea typeface="Calibri" pitchFamily="34" charset="-122"/>
                           <a:cs typeface="Calibri" pitchFamily="34" charset="-120"/>
                         </a:rPr>
-                        <a:t>0.01%</a:t>
+                        <a:t>0.68%</a:t>
                       </a:r>
                       <a:endParaRPr lang="en-US" sz="500" dirty="0">
                         <a:latin typeface="Calibri" charset="0"/>
@@ -21978,7 +21978,7 @@
                           <a:ea typeface="Calibri" pitchFamily="34" charset="-122"/>
                           <a:cs typeface="Calibri" pitchFamily="34" charset="-120"/>
                         </a:rPr>
-                        <a:t>0.01%</a:t>
+                        <a:t>0.65%</a:t>
                       </a:r>
                       <a:endParaRPr lang="en-US" sz="500" dirty="0">
                         <a:latin typeface="Calibri" charset="0"/>
@@ -22043,7 +22043,7 @@
                           <a:ea typeface="Calibri" pitchFamily="34" charset="-122"/>
                           <a:cs typeface="Calibri" pitchFamily="34" charset="-120"/>
                         </a:rPr>
-                        <a:t>0.01%</a:t>
+                        <a:t>0.62%</a:t>
                       </a:r>
                       <a:endParaRPr lang="en-US" sz="500" dirty="0">
                         <a:latin typeface="Calibri" charset="0"/>
@@ -22173,7 +22173,7 @@
                           <a:ea typeface="Calibri" pitchFamily="34" charset="-122"/>
                           <a:cs typeface="Calibri" pitchFamily="34" charset="-120"/>
                         </a:rPr>
-                        <a:t>7.57%</a:t>
+                        <a:t>15.78%</a:t>
                       </a:r>
                       <a:endParaRPr lang="en-US" sz="500" dirty="0">
                         <a:latin typeface="Calibri" charset="0"/>
@@ -22359,7 +22359,7 @@
                           <a:ea typeface="Calibri" pitchFamily="34" charset="-122"/>
                           <a:cs typeface="Calibri" pitchFamily="34" charset="-120"/>
                         </a:rPr>
-                        <a:t>0.01%</a:t>
+                        <a:t>1.10%</a:t>
                       </a:r>
                       <a:endParaRPr lang="en-US" sz="500" dirty="0">
                         <a:latin typeface="Calibri" charset="0"/>
@@ -22424,7 +22424,7 @@
                           <a:ea typeface="Calibri" pitchFamily="34" charset="-122"/>
                           <a:cs typeface="Calibri" pitchFamily="34" charset="-120"/>
                         </a:rPr>
-                        <a:t>0.01%</a:t>
+                        <a:t>0.91%</a:t>
                       </a:r>
                       <a:endParaRPr lang="en-US" sz="500" dirty="0">
                         <a:latin typeface="Calibri" charset="0"/>
@@ -22489,7 +22489,7 @@
                           <a:ea typeface="Calibri" pitchFamily="34" charset="-122"/>
                           <a:cs typeface="Calibri" pitchFamily="34" charset="-120"/>
                         </a:rPr>
-                        <a:t>0.01%</a:t>
+                        <a:t>1.03%</a:t>
                       </a:r>
                       <a:endParaRPr lang="en-US" sz="500" dirty="0">
                         <a:latin typeface="Calibri" charset="0"/>
@@ -22554,7 +22554,7 @@
                           <a:ea typeface="Calibri" pitchFamily="34" charset="-122"/>
                           <a:cs typeface="Calibri" pitchFamily="34" charset="-120"/>
                         </a:rPr>
-                        <a:t>0.01%</a:t>
+                        <a:t>0.98%</a:t>
                       </a:r>
                       <a:endParaRPr lang="en-US" sz="500" dirty="0">
                         <a:latin typeface="Calibri" charset="0"/>
@@ -22619,7 +22619,7 @@
                           <a:ea typeface="Calibri" pitchFamily="34" charset="-122"/>
                           <a:cs typeface="Calibri" pitchFamily="34" charset="-120"/>
                         </a:rPr>
-                        <a:t>0.01%</a:t>
+                        <a:t>1.06%</a:t>
                       </a:r>
                       <a:endParaRPr lang="en-US" sz="500" dirty="0">
                         <a:latin typeface="Calibri" charset="0"/>
@@ -22684,7 +22684,7 @@
                           <a:ea typeface="Calibri" pitchFamily="34" charset="-122"/>
                           <a:cs typeface="Calibri" pitchFamily="34" charset="-120"/>
                         </a:rPr>
-                        <a:t>0.01%</a:t>
+                        <a:t>0.95%</a:t>
                       </a:r>
                       <a:endParaRPr lang="en-US" sz="500" dirty="0">
                         <a:latin typeface="Calibri" charset="0"/>
@@ -22749,7 +22749,7 @@
                           <a:ea typeface="Calibri" pitchFamily="34" charset="-122"/>
                           <a:cs typeface="Calibri" pitchFamily="34" charset="-120"/>
                         </a:rPr>
-                        <a:t>0.01%</a:t>
+                        <a:t>0.96%</a:t>
                       </a:r>
                       <a:endParaRPr lang="en-US" sz="500" dirty="0">
                         <a:latin typeface="Calibri" charset="0"/>
@@ -22814,7 +22814,7 @@
                           <a:ea typeface="Calibri" pitchFamily="34" charset="-122"/>
                           <a:cs typeface="Calibri" pitchFamily="34" charset="-120"/>
                         </a:rPr>
-                        <a:t>0.01%</a:t>
+                        <a:t>0.95%</a:t>
                       </a:r>
                       <a:endParaRPr lang="en-US" sz="500" dirty="0">
                         <a:latin typeface="Calibri" charset="0"/>
@@ -22879,7 +22879,7 @@
                           <a:ea typeface="Calibri" pitchFamily="34" charset="-122"/>
                           <a:cs typeface="Calibri" pitchFamily="34" charset="-120"/>
                         </a:rPr>
-                        <a:t>0.01%</a:t>
+                        <a:t>0.92%</a:t>
                       </a:r>
                       <a:endParaRPr lang="en-US" sz="500" dirty="0">
                         <a:latin typeface="Calibri" charset="0"/>
@@ -22944,7 +22944,7 @@
                           <a:ea typeface="Calibri" pitchFamily="34" charset="-122"/>
                           <a:cs typeface="Calibri" pitchFamily="34" charset="-120"/>
                         </a:rPr>
-                        <a:t>0.01%</a:t>
+                        <a:t>0.81%</a:t>
                       </a:r>
                       <a:endParaRPr lang="en-US" sz="500" dirty="0">
                         <a:latin typeface="Calibri" charset="0"/>
@@ -23009,7 +23009,7 @@
                           <a:ea typeface="Calibri" pitchFamily="34" charset="-122"/>
                           <a:cs typeface="Calibri" pitchFamily="34" charset="-120"/>
                         </a:rPr>
-                        <a:t>0.01%</a:t>
+                        <a:t>0.75%</a:t>
                       </a:r>
                       <a:endParaRPr lang="en-US" sz="500" dirty="0">
                         <a:latin typeface="Calibri" charset="0"/>
@@ -23074,7 +23074,7 @@
                           <a:ea typeface="Calibri" pitchFamily="34" charset="-122"/>
                           <a:cs typeface="Calibri" pitchFamily="34" charset="-120"/>
                         </a:rPr>
-                        <a:t>0.01%</a:t>
+                        <a:t>0.78%</a:t>
                       </a:r>
                       <a:endParaRPr lang="en-US" sz="500" dirty="0">
                         <a:latin typeface="Calibri" charset="0"/>
@@ -23139,7 +23139,7 @@
                           <a:ea typeface="Calibri" pitchFamily="34" charset="-122"/>
                           <a:cs typeface="Calibri" pitchFamily="34" charset="-120"/>
                         </a:rPr>
-                        <a:t>0.11%</a:t>
+                        <a:t>11.79%</a:t>
                       </a:r>
                       <a:endParaRPr lang="en-US" sz="500" dirty="0">
                         <a:latin typeface="Calibri" charset="0"/>
@@ -24367,7 +24367,7 @@
                           <a:ea typeface="Calibri" pitchFamily="34" charset="-122"/>
                           <a:cs typeface="Calibri" pitchFamily="34" charset="-120"/>
                         </a:rPr>
-                        <a:t>0.01%</a:t>
+                        <a:t>0.53%</a:t>
                       </a:r>
                       <a:endParaRPr lang="en-US" sz="500" dirty="0">
                         <a:latin typeface="Calibri" charset="0"/>
@@ -24432,7 +24432,7 @@
                           <a:ea typeface="Calibri" pitchFamily="34" charset="-122"/>
                           <a:cs typeface="Calibri" pitchFamily="34" charset="-120"/>
                         </a:rPr>
-                        <a:t>0.00%</a:t>
+                        <a:t>0.48%</a:t>
                       </a:r>
                       <a:endParaRPr lang="en-US" sz="500" dirty="0">
                         <a:latin typeface="Calibri" charset="0"/>
@@ -24497,7 +24497,7 @@
                           <a:ea typeface="Calibri" pitchFamily="34" charset="-122"/>
                           <a:cs typeface="Calibri" pitchFamily="34" charset="-120"/>
                         </a:rPr>
-                        <a:t>0.00%</a:t>
+                        <a:t>0.43%</a:t>
                       </a:r>
                       <a:endParaRPr lang="en-US" sz="500" dirty="0">
                         <a:latin typeface="Calibri" charset="0"/>
@@ -24562,7 +24562,7 @@
                           <a:ea typeface="Calibri" pitchFamily="34" charset="-122"/>
                           <a:cs typeface="Calibri" pitchFamily="34" charset="-120"/>
                         </a:rPr>
-                        <a:t>0.00%</a:t>
+                        <a:t>0.40%</a:t>
                       </a:r>
                       <a:endParaRPr lang="en-US" sz="500" dirty="0">
                         <a:latin typeface="Calibri" charset="0"/>
@@ -24627,7 +24627,7 @@
                           <a:ea typeface="Calibri" pitchFamily="34" charset="-122"/>
                           <a:cs typeface="Calibri" pitchFamily="34" charset="-120"/>
                         </a:rPr>
-                        <a:t>0.00%</a:t>
+                        <a:t>0.37%</a:t>
                       </a:r>
                       <a:endParaRPr lang="en-US" sz="500" dirty="0">
                         <a:latin typeface="Calibri" charset="0"/>
@@ -24692,7 +24692,7 @@
                           <a:ea typeface="Calibri" pitchFamily="34" charset="-122"/>
                           <a:cs typeface="Calibri" pitchFamily="34" charset="-120"/>
                         </a:rPr>
-                        <a:t>0.00%</a:t>
+                        <a:t>0.35%</a:t>
                       </a:r>
                       <a:endParaRPr lang="en-US" sz="500" dirty="0">
                         <a:latin typeface="Calibri" charset="0"/>
@@ -24757,7 +24757,7 @@
                           <a:ea typeface="Calibri" pitchFamily="34" charset="-122"/>
                           <a:cs typeface="Calibri" pitchFamily="34" charset="-120"/>
                         </a:rPr>
-                        <a:t>0.00%</a:t>
+                        <a:t>0.35%</a:t>
                       </a:r>
                       <a:endParaRPr lang="en-US" sz="500" dirty="0">
                         <a:latin typeface="Calibri" charset="0"/>
@@ -24822,7 +24822,7 @@
                           <a:ea typeface="Calibri" pitchFamily="34" charset="-122"/>
                           <a:cs typeface="Calibri" pitchFamily="34" charset="-120"/>
                         </a:rPr>
-                        <a:t>0.00%</a:t>
+                        <a:t>0.34%</a:t>
                       </a:r>
                       <a:endParaRPr lang="en-US" sz="500" dirty="0">
                         <a:latin typeface="Calibri" charset="0"/>
@@ -24887,7 +24887,7 @@
                           <a:ea typeface="Calibri" pitchFamily="34" charset="-122"/>
                           <a:cs typeface="Calibri" pitchFamily="34" charset="-120"/>
                         </a:rPr>
-                        <a:t>0.00%</a:t>
+                        <a:t>0.33%</a:t>
                       </a:r>
                       <a:endParaRPr lang="en-US" sz="500" dirty="0">
                         <a:latin typeface="Calibri" charset="0"/>
@@ -24952,7 +24952,7 @@
                           <a:ea typeface="Calibri" pitchFamily="34" charset="-122"/>
                           <a:cs typeface="Calibri" pitchFamily="34" charset="-120"/>
                         </a:rPr>
-                        <a:t>0.00%</a:t>
+                        <a:t>0.32%</a:t>
                       </a:r>
                       <a:endParaRPr lang="en-US" sz="500" dirty="0">
                         <a:latin typeface="Calibri" charset="0"/>
@@ -25082,7 +25082,7 @@
                           <a:ea typeface="Calibri" pitchFamily="34" charset="-122"/>
                           <a:cs typeface="Calibri" pitchFamily="34" charset="-120"/>
                         </a:rPr>
-                        <a:t>-2.95%</a:t>
+                        <a:t>0.86%</a:t>
                       </a:r>
                       <a:endParaRPr lang="en-US" sz="500" dirty="0">
                         <a:latin typeface="Calibri" charset="0"/>
@@ -25268,7 +25268,7 @@
                           <a:ea typeface="Calibri" pitchFamily="34" charset="-122"/>
                           <a:cs typeface="Calibri" pitchFamily="34" charset="-120"/>
                         </a:rPr>
-                        <a:t>0.01%</a:t>
+                        <a:t>0.82%</a:t>
                       </a:r>
                       <a:endParaRPr lang="en-US" sz="500" dirty="0">
                         <a:latin typeface="Calibri" charset="0"/>
@@ -25333,7 +25333,7 @@
                           <a:ea typeface="Calibri" pitchFamily="34" charset="-122"/>
                           <a:cs typeface="Calibri" pitchFamily="34" charset="-120"/>
                         </a:rPr>
-                        <a:t>0.01%</a:t>
+                        <a:t>0.69%</a:t>
                       </a:r>
                       <a:endParaRPr lang="en-US" sz="500" dirty="0">
                         <a:latin typeface="Calibri" charset="0"/>
@@ -25398,7 +25398,7 @@
                           <a:ea typeface="Calibri" pitchFamily="34" charset="-122"/>
                           <a:cs typeface="Calibri" pitchFamily="34" charset="-120"/>
                         </a:rPr>
-                        <a:t>0.01%</a:t>
+                        <a:t>0.62%</a:t>
                       </a:r>
                       <a:endParaRPr lang="en-US" sz="500" dirty="0">
                         <a:latin typeface="Calibri" charset="0"/>
@@ -25463,7 +25463,7 @@
                           <a:ea typeface="Calibri" pitchFamily="34" charset="-122"/>
                           <a:cs typeface="Calibri" pitchFamily="34" charset="-120"/>
                         </a:rPr>
-                        <a:t>0.01%</a:t>
+                        <a:t>0.58%</a:t>
                       </a:r>
                       <a:endParaRPr lang="en-US" sz="500" dirty="0">
                         <a:latin typeface="Calibri" charset="0"/>
@@ -25528,7 +25528,7 @@
                           <a:ea typeface="Calibri" pitchFamily="34" charset="-122"/>
                           <a:cs typeface="Calibri" pitchFamily="34" charset="-120"/>
                         </a:rPr>
-                        <a:t>0.01%</a:t>
+                        <a:t>0.61%</a:t>
                       </a:r>
                       <a:endParaRPr lang="en-US" sz="500" dirty="0">
                         <a:latin typeface="Calibri" charset="0"/>
@@ -25593,7 +25593,7 @@
                           <a:ea typeface="Calibri" pitchFamily="34" charset="-122"/>
                           <a:cs typeface="Calibri" pitchFamily="34" charset="-120"/>
                         </a:rPr>
-                        <a:t>0.01%</a:t>
+                        <a:t>0.60%</a:t>
                       </a:r>
                       <a:endParaRPr lang="en-US" sz="500" dirty="0">
                         <a:latin typeface="Calibri" charset="0"/>
@@ -25658,7 +25658,7 @@
                           <a:ea typeface="Calibri" pitchFamily="34" charset="-122"/>
                           <a:cs typeface="Calibri" pitchFamily="34" charset="-120"/>
                         </a:rPr>
-                        <a:t>0.00%</a:t>
+                        <a:t>0.44%</a:t>
                       </a:r>
                       <a:endParaRPr lang="en-US" sz="500" dirty="0">
                         <a:latin typeface="Calibri" charset="0"/>
@@ -25723,7 +25723,7 @@
                           <a:ea typeface="Calibri" pitchFamily="34" charset="-122"/>
                           <a:cs typeface="Calibri" pitchFamily="34" charset="-120"/>
                         </a:rPr>
-                        <a:t>0.00%</a:t>
+                        <a:t>0.44%</a:t>
                       </a:r>
                       <a:endParaRPr lang="en-US" sz="500" dirty="0">
                         <a:latin typeface="Calibri" charset="0"/>
@@ -25788,7 +25788,7 @@
                           <a:ea typeface="Calibri" pitchFamily="34" charset="-122"/>
                           <a:cs typeface="Calibri" pitchFamily="34" charset="-120"/>
                         </a:rPr>
-                        <a:t>0.00%</a:t>
+                        <a:t>0.49%</a:t>
                       </a:r>
                       <a:endParaRPr lang="en-US" sz="500" dirty="0">
                         <a:latin typeface="Calibri" charset="0"/>
@@ -25853,7 +25853,7 @@
                           <a:ea typeface="Calibri" pitchFamily="34" charset="-122"/>
                           <a:cs typeface="Calibri" pitchFamily="34" charset="-120"/>
                         </a:rPr>
-                        <a:t>0.00%</a:t>
+                        <a:t>0.49%</a:t>
                       </a:r>
                       <a:endParaRPr lang="en-US" sz="500" dirty="0">
                         <a:latin typeface="Calibri" charset="0"/>
@@ -25918,7 +25918,7 @@
                           <a:ea typeface="Calibri" pitchFamily="34" charset="-122"/>
                           <a:cs typeface="Calibri" pitchFamily="34" charset="-120"/>
                         </a:rPr>
-                        <a:t>0.00%</a:t>
+                        <a:t>0.44%</a:t>
                       </a:r>
                       <a:endParaRPr lang="en-US" sz="500" dirty="0">
                         <a:latin typeface="Calibri" charset="0"/>
@@ -25983,7 +25983,7 @@
                           <a:ea typeface="Calibri" pitchFamily="34" charset="-122"/>
                           <a:cs typeface="Calibri" pitchFamily="34" charset="-120"/>
                         </a:rPr>
-                        <a:t>0.00%</a:t>
+                        <a:t>0.35%</a:t>
                       </a:r>
                       <a:endParaRPr lang="en-US" sz="500" dirty="0">
                         <a:latin typeface="Calibri" charset="0"/>
@@ -26048,7 +26048,7 @@
                           <a:ea typeface="Calibri" pitchFamily="34" charset="-122"/>
                           <a:cs typeface="Calibri" pitchFamily="34" charset="-120"/>
                         </a:rPr>
-                        <a:t>0.07%</a:t>
+                        <a:t>6.78%</a:t>
                       </a:r>
                       <a:endParaRPr lang="en-US" sz="500" dirty="0">
                         <a:latin typeface="Calibri" charset="0"/>
@@ -28177,7 +28177,7 @@
                           <a:ea typeface="Calibri" pitchFamily="34" charset="-122"/>
                           <a:cs typeface="Calibri" pitchFamily="34" charset="-120"/>
                         </a:rPr>
-                        <a:t>0.00%</a:t>
+                        <a:t>0.33%</a:t>
                       </a:r>
                       <a:endParaRPr lang="en-US" sz="500" dirty="0">
                         <a:latin typeface="Calibri" charset="0"/>
@@ -28242,7 +28242,7 @@
                           <a:ea typeface="Calibri" pitchFamily="34" charset="-122"/>
                           <a:cs typeface="Calibri" pitchFamily="34" charset="-120"/>
                         </a:rPr>
-                        <a:t>0.00%</a:t>
+                        <a:t>0.36%</a:t>
                       </a:r>
                       <a:endParaRPr lang="en-US" sz="500" dirty="0">
                         <a:latin typeface="Calibri" charset="0"/>
@@ -28307,7 +28307,7 @@
                           <a:ea typeface="Calibri" pitchFamily="34" charset="-122"/>
                           <a:cs typeface="Calibri" pitchFamily="34" charset="-120"/>
                         </a:rPr>
-                        <a:t>0.00%</a:t>
+                        <a:t>0.40%</a:t>
                       </a:r>
                       <a:endParaRPr lang="en-US" sz="500" dirty="0">
                         <a:latin typeface="Calibri" charset="0"/>
@@ -28372,7 +28372,7 @@
                           <a:ea typeface="Calibri" pitchFamily="34" charset="-122"/>
                           <a:cs typeface="Calibri" pitchFamily="34" charset="-120"/>
                         </a:rPr>
-                        <a:t>0.00%</a:t>
+                        <a:t>0.40%</a:t>
                       </a:r>
                       <a:endParaRPr lang="en-US" sz="500" dirty="0">
                         <a:latin typeface="Calibri" charset="0"/>
@@ -28437,7 +28437,7 @@
                           <a:ea typeface="Calibri" pitchFamily="34" charset="-122"/>
                           <a:cs typeface="Calibri" pitchFamily="34" charset="-120"/>
                         </a:rPr>
-                        <a:t>0.00%</a:t>
+                        <a:t>0.39%</a:t>
                       </a:r>
                       <a:endParaRPr lang="en-US" sz="500" dirty="0">
                         <a:latin typeface="Calibri" charset="0"/>
@@ -28502,7 +28502,7 @@
                           <a:ea typeface="Calibri" pitchFamily="34" charset="-122"/>
                           <a:cs typeface="Calibri" pitchFamily="34" charset="-120"/>
                         </a:rPr>
-                        <a:t>0.01%</a:t>
+                        <a:t>0.50%</a:t>
                       </a:r>
                       <a:endParaRPr lang="en-US" sz="500" dirty="0">
                         <a:latin typeface="Calibri" charset="0"/>
@@ -28567,7 +28567,7 @@
                           <a:ea typeface="Calibri" pitchFamily="34" charset="-122"/>
                           <a:cs typeface="Calibri" pitchFamily="34" charset="-120"/>
                         </a:rPr>
-                        <a:t>0.01%</a:t>
+                        <a:t>0.52%</a:t>
                       </a:r>
                       <a:endParaRPr lang="en-US" sz="500" dirty="0">
                         <a:latin typeface="Calibri" charset="0"/>
@@ -28957,7 +28957,7 @@
                           <a:ea typeface="Calibri" pitchFamily="34" charset="-122"/>
                           <a:cs typeface="Calibri" pitchFamily="34" charset="-120"/>
                         </a:rPr>
-                        <a:t>2.41%</a:t>
+                        <a:t>5.40%</a:t>
                       </a:r>
                       <a:endParaRPr lang="en-US" sz="500" dirty="0">
                         <a:latin typeface="Calibri" charset="0"/>

--- a/folletos/2026-04/pptx/FIP_VANTRUST_LIQUIDEZ_SENCILLO.pptx
+++ b/folletos/2026-04/pptx/FIP_VANTRUST_LIQUIDEZ_SENCILLO.pptx
@@ -3113,7 +3113,7 @@
                 <a:ea typeface="Calibri" pitchFamily="34" charset="-122"/>
                 <a:cs typeface="Calibri" pitchFamily="34" charset="-120"/>
               </a:rPr>
-              <a:t>prueba CLP</a:t>
+              <a:t>prueba 13 CLP</a:t>
             </a:r>
             <a:endParaRPr lang="en-US" sz="800" dirty="0"/>
           </a:p>

--- a/folletos/2026-04/pptx/FIP_VANTRUST_LIQUIDEZ_SENCILLO.pptx
+++ b/folletos/2026-04/pptx/FIP_VANTRUST_LIQUIDEZ_SENCILLO.pptx
@@ -4445,7 +4445,7 @@
                 <a:ea typeface="Calibri" pitchFamily="34" charset="-122"/>
                 <a:cs typeface="Calibri" pitchFamily="34" charset="-120"/>
               </a:rPr>
-              <a:t>prueba CLP</a:t>
+              <a:t>prueba 13 CLP</a:t>
             </a:r>
             <a:endParaRPr lang="en-US" sz="800" dirty="0"/>
           </a:p>

--- a/folletos/2026-04/pptx/FIP_VANTRUST_LIQUIDEZ_SENCILLO.pptx
+++ b/folletos/2026-04/pptx/FIP_VANTRUST_LIQUIDEZ_SENCILLO.pptx
@@ -4445,7 +4445,7 @@
                 <a:ea typeface="Calibri" pitchFamily="34" charset="-122"/>
                 <a:cs typeface="Calibri" pitchFamily="34" charset="-120"/>
               </a:rPr>
-              <a:t>prueba CLP</a:t>
+              <a:t>prueba 14 CLP</a:t>
             </a:r>
             <a:endParaRPr lang="en-US" sz="800" dirty="0"/>
           </a:p>
